--- a/1 Year 12 Weekly/Week 24 (15 Mar) 2.1.5 Concurrency (review, KA8)/1 Lesson 2.1.5.pptx
+++ b/1 Year 12 Weekly/Week 24 (15 Mar) 2.1.5 Concurrency (review, KA8)/1 Lesson 2.1.5.pptx
@@ -3183,7 +3183,7 @@
                 </a:solidFill>
                 <a:latin typeface="Calibri"/>
               </a:rPr>
-              <a:t>Lesson deck — editable skeleton: adapt freely.</a:t>
+              <a:t>Editable lesson deck — adapt freely.</a:t>
             </a:r>
           </a:p>
         </p:txBody>
@@ -3272,7 +3272,7 @@
           <a:p>
             <a:pPr/>
             <a:r>
-              <a:rPr sz="2200" b="0">
+              <a:rPr sz="2000" b="0">
                 <a:solidFill>
                   <a:srgbClr val="222222"/>
                 </a:solidFill>
@@ -3284,7 +3284,7 @@
           <a:p>
             <a:pPr/>
             <a:r>
-              <a:rPr sz="2200" b="0">
+              <a:rPr sz="2000" b="0">
                 <a:solidFill>
                   <a:srgbClr val="222222"/>
                 </a:solidFill>
@@ -3296,7 +3296,7 @@
           <a:p>
             <a:pPr/>
             <a:r>
-              <a:rPr sz="2200" b="0">
+              <a:rPr sz="2000" b="0">
                 <a:solidFill>
                   <a:srgbClr val="222222"/>
                 </a:solidFill>
@@ -3403,7 +3403,7 @@
           <a:p>
             <a:pPr lvl="1"/>
             <a:r>
-              <a:rPr sz="2000" b="0">
+              <a:rPr sz="1900" b="0">
                 <a:solidFill>
                   <a:srgbClr val="222222"/>
                 </a:solidFill>
@@ -3415,7 +3415,7 @@
           <a:p>
             <a:pPr lvl="1"/>
             <a:r>
-              <a:rPr sz="2000" b="0">
+              <a:rPr sz="1900" b="0">
                 <a:solidFill>
                   <a:srgbClr val="222222"/>
                 </a:solidFill>
@@ -3427,7 +3427,7 @@
           <a:p>
             <a:pPr lvl="1"/>
             <a:r>
-              <a:rPr sz="2000" b="0">
+              <a:rPr sz="1900" b="0">
                 <a:solidFill>
                   <a:srgbClr val="222222"/>
                 </a:solidFill>
@@ -3439,7 +3439,7 @@
           <a:p>
             <a:pPr lvl="1"/>
             <a:r>
-              <a:rPr sz="2000" b="0">
+              <a:rPr sz="1900" b="0">
                 <a:solidFill>
                   <a:srgbClr val="222222"/>
                 </a:solidFill>
@@ -3451,7 +3451,7 @@
           <a:p>
             <a:pPr lvl="1"/>
             <a:r>
-              <a:rPr sz="2000" b="0">
+              <a:rPr sz="1900" b="0">
                 <a:solidFill>
                   <a:srgbClr val="222222"/>
                 </a:solidFill>
@@ -3463,7 +3463,7 @@
           <a:p>
             <a:pPr lvl="1"/>
             <a:r>
-              <a:rPr sz="2000" b="0">
+              <a:rPr sz="1900" b="0">
                 <a:solidFill>
                   <a:srgbClr val="222222"/>
                 </a:solidFill>
@@ -4667,7 +4667,7 @@
           <a:p>
             <a:pPr/>
             <a:r>
-              <a:rPr sz="2200" b="0">
+              <a:rPr sz="2000" b="0">
                 <a:solidFill>
                   <a:srgbClr val="222222"/>
                 </a:solidFill>
@@ -4679,7 +4679,7 @@
           <a:p>
             <a:pPr/>
             <a:r>
-              <a:rPr sz="2200" b="0">
+              <a:rPr sz="2000" b="0">
                 <a:solidFill>
                   <a:srgbClr val="222222"/>
                 </a:solidFill>
@@ -4691,7 +4691,7 @@
           <a:p>
             <a:pPr/>
             <a:r>
-              <a:rPr sz="2200" b="0">
+              <a:rPr sz="2000" b="0">
                 <a:solidFill>
                   <a:srgbClr val="222222"/>
                 </a:solidFill>
@@ -4786,7 +4786,7 @@
           <a:p>
             <a:pPr/>
             <a:r>
-              <a:rPr sz="2200" b="0">
+              <a:rPr sz="2000" b="0">
                 <a:solidFill>
                   <a:srgbClr val="222222"/>
                 </a:solidFill>
@@ -4798,7 +4798,7 @@
           <a:p>
             <a:pPr/>
             <a:r>
-              <a:rPr sz="2200" b="0">
+              <a:rPr sz="2000" b="0">
                 <a:solidFill>
                   <a:srgbClr val="222222"/>
                 </a:solidFill>
@@ -4810,7 +4810,7 @@
           <a:p>
             <a:pPr/>
             <a:r>
-              <a:rPr sz="2200" b="0">
+              <a:rPr sz="2000" b="0">
                 <a:solidFill>
                   <a:srgbClr val="222222"/>
                 </a:solidFill>
@@ -4905,7 +4905,7 @@
           <a:p>
             <a:pPr/>
             <a:r>
-              <a:rPr sz="2200" b="0">
+              <a:rPr sz="2000" b="0">
                 <a:solidFill>
                   <a:srgbClr val="222222"/>
                 </a:solidFill>
@@ -4917,7 +4917,7 @@
           <a:p>
             <a:pPr/>
             <a:r>
-              <a:rPr sz="2200" b="0">
+              <a:rPr sz="2000" b="0">
                 <a:solidFill>
                   <a:srgbClr val="222222"/>
                 </a:solidFill>
@@ -4929,7 +4929,7 @@
           <a:p>
             <a:pPr/>
             <a:r>
-              <a:rPr sz="2200" b="0">
+              <a:rPr sz="2000" b="0">
                 <a:solidFill>
                   <a:srgbClr val="222222"/>
                 </a:solidFill>
@@ -5024,7 +5024,7 @@
           <a:p>
             <a:pPr/>
             <a:r>
-              <a:rPr sz="2200" b="0">
+              <a:rPr sz="2000" b="0">
                 <a:solidFill>
                   <a:srgbClr val="222222"/>
                 </a:solidFill>
@@ -5036,7 +5036,7 @@
           <a:p>
             <a:pPr/>
             <a:r>
-              <a:rPr sz="2200" b="0">
+              <a:rPr sz="2000" b="0">
                 <a:solidFill>
                   <a:srgbClr val="222222"/>
                 </a:solidFill>
@@ -5048,7 +5048,7 @@
           <a:p>
             <a:pPr/>
             <a:r>
-              <a:rPr sz="2200" b="0">
+              <a:rPr sz="2000" b="0">
                 <a:solidFill>
                   <a:srgbClr val="222222"/>
                 </a:solidFill>

--- a/1 Year 12 Weekly/Week 24 (15 Mar) 2.1.5 Concurrency (review, KA8)/1 Lesson 2.1.5.pptx
+++ b/1 Year 12 Weekly/Week 24 (15 Mar) 2.1.5 Concurrency (review, KA8)/1 Lesson 2.1.5.pptx
@@ -19,6 +19,22 @@
     <p:sldId id="267" r:id="rId18"/>
     <p:sldId id="268" r:id="rId19"/>
     <p:sldId id="269" r:id="rId20"/>
+    <p:sldId id="270" r:id="rId21"/>
+    <p:sldId id="271" r:id="rId22"/>
+    <p:sldId id="272" r:id="rId23"/>
+    <p:sldId id="273" r:id="rId24"/>
+    <p:sldId id="274" r:id="rId25"/>
+    <p:sldId id="275" r:id="rId26"/>
+    <p:sldId id="276" r:id="rId27"/>
+    <p:sldId id="277" r:id="rId28"/>
+    <p:sldId id="278" r:id="rId29"/>
+    <p:sldId id="279" r:id="rId30"/>
+    <p:sldId id="280" r:id="rId31"/>
+    <p:sldId id="281" r:id="rId32"/>
+    <p:sldId id="282" r:id="rId33"/>
+    <p:sldId id="283" r:id="rId34"/>
+    <p:sldId id="284" r:id="rId35"/>
+    <p:sldId id="285" r:id="rId36"/>
   </p:sldIdLst>
   <p:sldSz cx="12191695" cy="6858000" type="screen4x3"/>
   <p:notesSz cx="6858000" cy="9144000"/>
@@ -3183,7 +3199,7 @@
                 </a:solidFill>
                 <a:latin typeface="Calibri"/>
               </a:rPr>
-              <a:t>Editable lesson deck — adapt freely.</a:t>
+              <a:t>Week 24 (15 Mar)</a:t>
             </a:r>
           </a:p>
         </p:txBody>
@@ -3243,7 +3259,7 @@
                 </a:solidFill>
                 <a:latin typeface="Calibri"/>
               </a:rPr>
-              <a:t>Exam technique</a:t>
+              <a:t>Concurrency in software</a:t>
             </a:r>
           </a:p>
         </p:txBody>
@@ -3278,7 +3294,7 @@
                 </a:solidFill>
                 <a:latin typeface="Calibri"/>
               </a:rPr>
-              <a:t>Check for data dependencies before claiming tasks can run together.</a:t>
+              <a:t>A phone app downloads a file while its interface keeps responding to taps.</a:t>
             </a:r>
           </a:p>
           <a:p>
@@ -3290,7 +3306,7 @@
                 </a:solidFill>
                 <a:latin typeface="Calibri"/>
               </a:rPr>
-              <a:t>When asked to discuss, pair a benefit with a trade-off.</a:t>
+              <a:t>A web server handles thousands of visitors' requests at once.</a:t>
             </a:r>
           </a:p>
           <a:p>
@@ -3302,7 +3318,19 @@
                 </a:solidFill>
                 <a:latin typeface="Calibri"/>
               </a:rPr>
-              <a:t>Apply to the scenario's actual tasks, not generic statements.</a:t>
+              <a:t>A game updates enemy behaviour while playing music and reading player input.</a:t>
+            </a:r>
+          </a:p>
+          <a:p>
+            <a:pPr/>
+            <a:r>
+              <a:rPr sz="2000" b="0">
+                <a:solidFill>
+                  <a:srgbClr val="222222"/>
+                </a:solidFill>
+                <a:latin typeface="Calibri"/>
+              </a:rPr>
+              <a:t>A photo upload can generate thumbnails, scan content and save the original simultaneously.</a:t>
             </a:r>
           </a:p>
         </p:txBody>
@@ -3362,7 +3390,7 @@
                 </a:solidFill>
                 <a:latin typeface="Calibri"/>
               </a:rPr>
-              <a:t>Worked example</a:t>
+              <a:t>Benefit: speed and hardware use</a:t>
             </a:r>
           </a:p>
         </p:txBody>
@@ -3391,85 +3419,49 @@
           <a:p>
             <a:pPr/>
             <a:r>
-              <a:rPr sz="2200" b="1">
-                <a:solidFill>
-                  <a:srgbClr val="2B6CB0"/>
-                </a:solidFill>
-                <a:latin typeface="Calibri"/>
-              </a:rPr>
-              <a:t>Handling a photo upload with concurrent thinking</a:t>
-            </a:r>
-          </a:p>
-          <a:p>
-            <a:pPr lvl="1"/>
-            <a:r>
-              <a:rPr sz="1900" b="0">
-                <a:solidFill>
-                  <a:srgbClr val="222222"/>
-                </a:solidFill>
-                <a:latin typeface="Calibri"/>
-              </a:rPr>
-              <a:t>1. List the tasks: (a) generate three thumbnail sizes, (b) scan the image for prohibited content, (c) save the original to storage.</a:t>
-            </a:r>
-          </a:p>
-          <a:p>
-            <a:pPr lvl="1"/>
-            <a:r>
-              <a:rPr sz="1900" b="0">
-                <a:solidFill>
-                  <a:srgbClr val="222222"/>
-                </a:solidFill>
-                <a:latin typeface="Calibri"/>
-              </a:rPr>
-              <a:t>2. Check dependencies: all three work from the same uploaded image and do not need each other's output, so they are largely independent.</a:t>
-            </a:r>
-          </a:p>
-          <a:p>
-            <a:pPr lvl="1"/>
-            <a:r>
-              <a:rPr sz="1900" b="0">
-                <a:solidFill>
-                  <a:srgbClr val="222222"/>
-                </a:solidFill>
-                <a:latin typeface="Calibri"/>
-              </a:rPr>
-              <a:t>3. Decide concurrency: (a), (b) and (c) can run at the same time.</a:t>
-            </a:r>
-          </a:p>
-          <a:p>
-            <a:pPr lvl="1"/>
-            <a:r>
-              <a:rPr sz="1900" b="0">
-                <a:solidFill>
-                  <a:srgbClr val="222222"/>
-                </a:solidFill>
-                <a:latin typeface="Calibri"/>
-              </a:rPr>
-              <a:t>4. Note a sequencing point: the photo should not be published until the content scan result is checked, even if the work runs in parallel.</a:t>
-            </a:r>
-          </a:p>
-          <a:p>
-            <a:pPr lvl="1"/>
-            <a:r>
-              <a:rPr sz="1900" b="0">
-                <a:solidFill>
-                  <a:srgbClr val="222222"/>
-                </a:solidFill>
-                <a:latin typeface="Calibri"/>
-              </a:rPr>
-              <a:t>5. Benefit: running them together makes the upload feel faster and keeps the app responsive across cores.</a:t>
-            </a:r>
-          </a:p>
-          <a:p>
-            <a:pPr lvl="1"/>
-            <a:r>
-              <a:rPr sz="1900" b="0">
-                <a:solidFill>
-                  <a:srgbClr val="222222"/>
-                </a:solidFill>
-                <a:latin typeface="Calibri"/>
-              </a:rPr>
-              <a:t>6. Trade-off: concurrency is harder to debug and risks race conditions if tasks touch shared storage; on limited hardware it may not be truly faster.</a:t>
+              <a:rPr sz="2000" b="0">
+                <a:solidFill>
+                  <a:srgbClr val="222222"/>
+                </a:solidFill>
+                <a:latin typeface="Calibri"/>
+              </a:rPr>
+              <a:t>Independent tasks spread across cores finish sooner than the same tasks queued on one.</a:t>
+            </a:r>
+          </a:p>
+          <a:p>
+            <a:pPr/>
+            <a:r>
+              <a:rPr sz="2000" b="0">
+                <a:solidFill>
+                  <a:srgbClr val="222222"/>
+                </a:solidFill>
+                <a:latin typeface="Calibri"/>
+              </a:rPr>
+              <a:t>Modern CPUs have many cores; a purely sequential program leaves most of them idle.</a:t>
+            </a:r>
+          </a:p>
+          <a:p>
+            <a:pPr/>
+            <a:r>
+              <a:rPr sz="2000" b="0">
+                <a:solidFill>
+                  <a:srgbClr val="222222"/>
+                </a:solidFill>
+                <a:latin typeface="Calibri"/>
+              </a:rPr>
+              <a:t>While one task waits for slow input or output, another can use the processor.</a:t>
+            </a:r>
+          </a:p>
+          <a:p>
+            <a:pPr/>
+            <a:r>
+              <a:rPr sz="2000" b="0">
+                <a:solidFill>
+                  <a:srgbClr val="222222"/>
+                </a:solidFill>
+                <a:latin typeface="Calibri"/>
+              </a:rPr>
+              <a:t>Total time shrinks towards the longest chain of dependent steps, not the sum of all steps.</a:t>
             </a:r>
           </a:p>
         </p:txBody>
@@ -3529,7 +3521,7 @@
                 </a:solidFill>
                 <a:latin typeface="Calibri"/>
               </a:rPr>
-              <a:t>Your turn</a:t>
+              <a:t>Benefit: responsiveness</a:t>
             </a:r>
           </a:p>
         </p:txBody>
@@ -3558,48 +3550,49 @@
           <a:p>
             <a:pPr/>
             <a:r>
-              <a:rPr sz="2400" b="1">
-                <a:solidFill>
-                  <a:srgbClr val="2B6CB0"/>
-                </a:solidFill>
-                <a:latin typeface="Calibri"/>
-              </a:rPr>
-              <a:t>Task</a:t>
-            </a:r>
-          </a:p>
-          <a:p>
-            <a:pPr lvl="1"/>
-            <a:r>
-              <a:rPr sz="2200" b="0">
-                <a:solidFill>
-                  <a:srgbClr val="222222"/>
-                </a:solidFill>
-                <a:latin typeface="Calibri"/>
-              </a:rPr>
-              <a:t>An online store builds a sales report by (i) totalling each region's sales and (ii) combining the regional totals into a grand total. Explain which part can run concurrently and which must run afterwards, referring to data dependency, then give one benefit of doing the regional work concurrently.</a:t>
-            </a:r>
-          </a:p>
-          <a:p>
-            <a:r>
-              <a:rPr sz="2400" b="1">
-                <a:solidFill>
-                  <a:srgbClr val="B76E00"/>
-                </a:solidFill>
-                <a:latin typeface="Calibri"/>
-              </a:rPr>
-              <a:t>Challenge / stretch</a:t>
-            </a:r>
-          </a:p>
-          <a:p>
-            <a:pPr lvl="1"/>
-            <a:r>
-              <a:rPr sz="2200" b="0">
-                <a:solidFill>
-                  <a:srgbClr val="222222"/>
-                </a:solidFill>
-                <a:latin typeface="Calibri"/>
-              </a:rPr>
-              <a:t>A shared online ticket-booking system risks selling the same seat twice under concurrency. Explain how this race condition arises, and describe one way to prevent it, noting the trade-off your fix introduces.</a:t>
+              <a:rPr sz="2000" b="0">
+                <a:solidFill>
+                  <a:srgbClr val="222222"/>
+                </a:solidFill>
+                <a:latin typeface="Calibri"/>
+              </a:rPr>
+              <a:t>A long task run sequentially freezes everything behind it, including the user interface.</a:t>
+            </a:r>
+          </a:p>
+          <a:p>
+            <a:pPr/>
+            <a:r>
+              <a:rPr sz="2000" b="0">
+                <a:solidFill>
+                  <a:srgbClr val="222222"/>
+                </a:solidFill>
+                <a:latin typeface="Calibri"/>
+              </a:rPr>
+              <a:t>Run concurrently, the slow work continues in the background while the interface stays live.</a:t>
+            </a:r>
+          </a:p>
+          <a:p>
+            <a:pPr/>
+            <a:r>
+              <a:rPr sz="2000" b="0">
+                <a:solidFill>
+                  <a:srgbClr val="222222"/>
+                </a:solidFill>
+                <a:latin typeface="Calibri"/>
+              </a:rPr>
+              <a:t>Users see progress bars and can cancel, instead of a frozen window.</a:t>
+            </a:r>
+          </a:p>
+          <a:p>
+            <a:pPr/>
+            <a:r>
+              <a:rPr sz="2000" b="0">
+                <a:solidFill>
+                  <a:srgbClr val="222222"/>
+                </a:solidFill>
+                <a:latin typeface="Calibri"/>
+              </a:rPr>
+              <a:t>Responsiveness matters even on a single core: waiting-heavy tasks interleave well.</a:t>
             </a:r>
           </a:p>
         </p:txBody>
@@ -3659,7 +3652,7 @@
                 </a:solidFill>
                 <a:latin typeface="Calibri"/>
               </a:rPr>
-              <a:t>Exit ticket</a:t>
+              <a:t>Trade-off: shared data and race conditions</a:t>
             </a:r>
           </a:p>
         </p:txBody>
@@ -3686,36 +3679,63 @@
           </a:bodyPr>
           <a:lstStyle/>
           <a:p>
-            <a:r>
-              <a:rPr sz="2200" b="1">
-                <a:solidFill>
-                  <a:srgbClr val="222222"/>
-                </a:solidFill>
-                <a:latin typeface="Calibri"/>
-              </a:rPr>
-              <a:t>1. Which is safe to run concurrently and why: (A) rendering then exporting that same clip, or (B) generating audio for scene 1 and scene 2?</a:t>
-            </a:r>
-          </a:p>
-          <a:p>
-            <a:r>
-              <a:rPr sz="2200" b="1">
-                <a:solidFill>
-                  <a:srgbClr val="222222"/>
-                </a:solidFill>
-                <a:latin typeface="Calibri"/>
-              </a:rPr>
-              <a:t>2. Two threads update a shared bank balance without coordination and the final figure depends on timing. Name the problem.</a:t>
-            </a:r>
-          </a:p>
-          <a:p>
-            <a:r>
-              <a:rPr sz="2200" b="1">
-                <a:solidFill>
-                  <a:srgbClr val="222222"/>
-                </a:solidFill>
-                <a:latin typeface="Calibri"/>
-              </a:rPr>
-              <a:t>3. Give one reason concurrency is not always faster.</a:t>
+            <a:pPr/>
+            <a:r>
+              <a:rPr sz="2000" b="0">
+                <a:solidFill>
+                  <a:srgbClr val="222222"/>
+                </a:solidFill>
+                <a:latin typeface="Calibri"/>
+              </a:rPr>
+              <a:t>Trouble starts when concurrent tasks read and write the same data.</a:t>
+            </a:r>
+          </a:p>
+          <a:p>
+            <a:pPr/>
+            <a:r>
+              <a:rPr sz="2000" b="0">
+                <a:solidFill>
+                  <a:srgbClr val="222222"/>
+                </a:solidFill>
+                <a:latin typeface="Calibri"/>
+              </a:rPr>
+              <a:t>Two tasks may both read a value, change it, and write back, losing one update.</a:t>
+            </a:r>
+          </a:p>
+          <a:p>
+            <a:pPr/>
+            <a:r>
+              <a:rPr sz="2000" b="0">
+                <a:solidFill>
+                  <a:srgbClr val="222222"/>
+                </a:solidFill>
+                <a:latin typeface="Calibri"/>
+              </a:rPr>
+              <a:t>Example: two travellers book the last seat because both checked before either saved.</a:t>
+            </a:r>
+          </a:p>
+          <a:p>
+            <a:pPr/>
+            <a:r>
+              <a:rPr sz="2000" b="0">
+                <a:solidFill>
+                  <a:srgbClr val="222222"/>
+                </a:solidFill>
+                <a:latin typeface="Calibri"/>
+              </a:rPr>
+              <a:t>The result depends on unpredictable timing: a race condition.</a:t>
+            </a:r>
+          </a:p>
+          <a:p>
+            <a:pPr/>
+            <a:r>
+              <a:rPr sz="2000" b="0">
+                <a:solidFill>
+                  <a:srgbClr val="222222"/>
+                </a:solidFill>
+                <a:latin typeface="Calibri"/>
+              </a:rPr>
+              <a:t>Preventing it means making tasks take turns with the shared data, which reintroduces waiting.</a:t>
             </a:r>
           </a:p>
         </p:txBody>
@@ -3775,7 +3795,7 @@
                 </a:solidFill>
                 <a:latin typeface="Calibri"/>
               </a:rPr>
-              <a:t>Exit ticket — answers</a:t>
+              <a:t>Trade-offs: coordination, testing and deadlock</a:t>
             </a:r>
           </a:p>
         </p:txBody>
@@ -3802,72 +3822,862 @@
           </a:bodyPr>
           <a:lstStyle/>
           <a:p>
+            <a:pPr/>
+            <a:r>
+              <a:rPr sz="2000" b="0">
+                <a:solidFill>
+                  <a:srgbClr val="222222"/>
+                </a:solidFill>
+                <a:latin typeface="Calibri"/>
+              </a:rPr>
+              <a:t>Someone must split the work, share out tasks and recombine results: coordination overhead.</a:t>
+            </a:r>
+          </a:p>
+          <a:p>
+            <a:pPr/>
+            <a:r>
+              <a:rPr sz="2000" b="0">
+                <a:solidFill>
+                  <a:srgbClr val="222222"/>
+                </a:solidFill>
+                <a:latin typeface="Calibri"/>
+              </a:rPr>
+              <a:t>Starting and switching between tasks costs time; tiny tasks can cost more than they save.</a:t>
+            </a:r>
+          </a:p>
+          <a:p>
+            <a:pPr/>
+            <a:r>
+              <a:rPr sz="2000" b="0">
+                <a:solidFill>
+                  <a:srgbClr val="222222"/>
+                </a:solidFill>
+                <a:latin typeface="Calibri"/>
+              </a:rPr>
+              <a:t>Timing-dependent bugs may appear one run in a thousand, making testing and debugging much harder.</a:t>
+            </a:r>
+          </a:p>
+          <a:p>
+            <a:pPr/>
+            <a:r>
+              <a:rPr sz="2000" b="0">
+                <a:solidFill>
+                  <a:srgbClr val="222222"/>
+                </a:solidFill>
+                <a:latin typeface="Calibri"/>
+              </a:rPr>
+              <a:t>Tasks waiting on resources each other hold can deadlock: everyone waits forever.</a:t>
+            </a:r>
+          </a:p>
+          <a:p>
+            <a:pPr/>
+            <a:r>
+              <a:rPr sz="2000" b="0">
+                <a:solidFill>
+                  <a:srgbClr val="222222"/>
+                </a:solidFill>
+                <a:latin typeface="Calibri"/>
+              </a:rPr>
+              <a:t>Some problems are inherently sequential: a running total needs each previous sum, so concurrency cannot help.</a:t>
+            </a:r>
+          </a:p>
+        </p:txBody>
+      </p:sp>
+    </p:spTree>
+  </p:cSld>
+  <p:clrMapOvr>
+    <a:masterClrMapping/>
+  </p:clrMapOvr>
+</p:sld>
+</file>
+
+<file path=ppt/slides/slide15.xml><?xml version="1.0" encoding="utf-8"?>
+<p:sld xmlns:a="http://schemas.openxmlformats.org/drawingml/2006/main" xmlns:p="http://schemas.openxmlformats.org/presentationml/2006/main" xmlns:r="http://schemas.openxmlformats.org/officeDocument/2006/relationships">
+  <p:cSld>
+    <p:bg>
+      <p:bgPr>
+        <a:solidFill>
+          <a:srgbClr val="FFFFFF"/>
+        </a:solidFill>
+        <a:effectLst/>
+      </p:bgPr>
+    </p:bg>
+    <p:spTree>
+      <p:nvGrpSpPr>
+        <p:cNvPr id="1" name=""/>
+        <p:cNvGrpSpPr/>
+        <p:nvPr/>
+      </p:nvGrpSpPr>
+      <p:grpSpPr/>
+      <p:sp>
+        <p:nvSpPr>
+          <p:cNvPr id="2" name="TextBox 1"/>
+          <p:cNvSpPr txBox="1"/>
+          <p:nvPr/>
+        </p:nvSpPr>
+        <p:spPr>
+          <a:xfrm>
+            <a:off x="548640" y="274320"/>
+            <a:ext cx="11064240" cy="822960"/>
+          </a:xfrm>
+          <a:prstGeom prst="rect">
+            <a:avLst/>
+          </a:prstGeom>
+          <a:noFill/>
+        </p:spPr>
+        <p:txBody>
+          <a:bodyPr wrap="square">
+            <a:spAutoFit/>
+          </a:bodyPr>
+          <a:lstStyle/>
+          <a:p>
+            <a:r>
+              <a:rPr sz="3000" b="1" i="0">
+                <a:solidFill>
+                  <a:srgbClr val="2B6CB0"/>
+                </a:solidFill>
+                <a:latin typeface="Calibri"/>
+              </a:rPr>
+              <a:t>Answering concurrency questions</a:t>
+            </a:r>
+          </a:p>
+        </p:txBody>
+      </p:sp>
+      <p:sp>
+        <p:nvSpPr>
+          <p:cNvPr id="3" name="TextBox 2"/>
+          <p:cNvSpPr txBox="1"/>
+          <p:nvPr/>
+        </p:nvSpPr>
+        <p:spPr>
+          <a:xfrm>
+            <a:off x="640080" y="1280160"/>
+            <a:ext cx="10881360" cy="5120640"/>
+          </a:xfrm>
+          <a:prstGeom prst="rect">
+            <a:avLst/>
+          </a:prstGeom>
+          <a:noFill/>
+        </p:spPr>
+        <p:txBody>
+          <a:bodyPr wrap="square">
+            <a:spAutoFit/>
+          </a:bodyPr>
+          <a:lstStyle/>
+          <a:p>
+            <a:pPr/>
+            <a:r>
+              <a:rPr sz="2000" b="0">
+                <a:solidFill>
+                  <a:srgbClr val="222222"/>
+                </a:solidFill>
+                <a:latin typeface="Calibri"/>
+              </a:rPr>
+              <a:t>Name the scenario's actual tasks; never answer with generic statements.</a:t>
+            </a:r>
+          </a:p>
+          <a:p>
+            <a:pPr/>
+            <a:r>
+              <a:rPr sz="2000" b="0">
+                <a:solidFill>
+                  <a:srgbClr val="222222"/>
+                </a:solidFill>
+                <a:latin typeface="Calibri"/>
+              </a:rPr>
+              <a:t>Justify each concurrent pair with independence, each sequential pair with its data dependency.</a:t>
+            </a:r>
+          </a:p>
+          <a:p>
+            <a:pPr/>
+            <a:r>
+              <a:rPr sz="2000" b="0">
+                <a:solidFill>
+                  <a:srgbClr val="222222"/>
+                </a:solidFill>
+                <a:latin typeface="Calibri"/>
+              </a:rPr>
+              <a:t>For discuss questions, pair every benefit with a trade-off and give a scenario-specific example.</a:t>
+            </a:r>
+          </a:p>
+          <a:p>
+            <a:pPr/>
+            <a:r>
+              <a:rPr sz="2000" b="0">
+                <a:solidFill>
+                  <a:srgbClr val="222222"/>
+                </a:solidFill>
+                <a:latin typeface="Calibri"/>
+              </a:rPr>
+              <a:t>State the hardware caveat: multiple cores give true parallelism, one core only time-slices.</a:t>
+            </a:r>
+          </a:p>
+        </p:txBody>
+      </p:sp>
+    </p:spTree>
+  </p:cSld>
+  <p:clrMapOvr>
+    <a:masterClrMapping/>
+  </p:clrMapOvr>
+</p:sld>
+</file>
+
+<file path=ppt/slides/slide16.xml><?xml version="1.0" encoding="utf-8"?>
+<p:sld xmlns:a="http://schemas.openxmlformats.org/drawingml/2006/main" xmlns:p="http://schemas.openxmlformats.org/presentationml/2006/main" xmlns:r="http://schemas.openxmlformats.org/officeDocument/2006/relationships">
+  <p:cSld>
+    <p:bg>
+      <p:bgPr>
+        <a:solidFill>
+          <a:srgbClr val="FFFFFF"/>
+        </a:solidFill>
+        <a:effectLst/>
+      </p:bgPr>
+    </p:bg>
+    <p:spTree>
+      <p:nvGrpSpPr>
+        <p:cNvPr id="1" name=""/>
+        <p:cNvGrpSpPr/>
+        <p:nvPr/>
+      </p:nvGrpSpPr>
+      <p:grpSpPr/>
+      <p:sp>
+        <p:nvSpPr>
+          <p:cNvPr id="2" name="TextBox 1"/>
+          <p:cNvSpPr txBox="1"/>
+          <p:nvPr/>
+        </p:nvSpPr>
+        <p:spPr>
+          <a:xfrm>
+            <a:off x="548640" y="274320"/>
+            <a:ext cx="11064240" cy="822960"/>
+          </a:xfrm>
+          <a:prstGeom prst="rect">
+            <a:avLst/>
+          </a:prstGeom>
+          <a:noFill/>
+        </p:spPr>
+        <p:txBody>
+          <a:bodyPr wrap="square">
+            <a:spAutoFit/>
+          </a:bodyPr>
+          <a:lstStyle/>
+          <a:p>
+            <a:r>
+              <a:rPr sz="3000" b="1" i="0">
+                <a:solidFill>
+                  <a:srgbClr val="2B6CB0"/>
+                </a:solidFill>
+                <a:latin typeface="Calibri"/>
+              </a:rPr>
+              <a:t>Worked example 1</a:t>
+            </a:r>
+          </a:p>
+        </p:txBody>
+      </p:sp>
+      <p:sp>
+        <p:nvSpPr>
+          <p:cNvPr id="3" name="TextBox 2"/>
+          <p:cNvSpPr txBox="1"/>
+          <p:nvPr/>
+        </p:nvSpPr>
+        <p:spPr>
+          <a:xfrm>
+            <a:off x="640080" y="1280160"/>
+            <a:ext cx="10881360" cy="5120640"/>
+          </a:xfrm>
+          <a:prstGeom prst="rect">
+            <a:avLst/>
+          </a:prstGeom>
+          <a:noFill/>
+        </p:spPr>
+        <p:txBody>
+          <a:bodyPr wrap="square">
+            <a:spAutoFit/>
+          </a:bodyPr>
+          <a:lstStyle/>
+          <a:p>
+            <a:pPr/>
             <a:r>
               <a:rPr sz="2200" b="1">
                 <a:solidFill>
-                  <a:srgbClr val="222222"/>
-                </a:solidFill>
-                <a:latin typeface="Calibri"/>
-              </a:rPr>
-              <a:t>1. Which is safe to run concurrently and why: (A) rendering then exporting that same clip, or (B) generating audio for scene 1 and scene 2?</a:t>
+                  <a:srgbClr val="2B6CB0"/>
+                </a:solidFill>
+                <a:latin typeface="Calibri"/>
+              </a:rPr>
+              <a:t>Applying concurrent thinking to a photo upload</a:t>
             </a:r>
           </a:p>
           <a:p>
             <a:pPr lvl="1"/>
             <a:r>
-              <a:rPr sz="1800" i="1">
+              <a:rPr sz="1900" b="0">
+                <a:solidFill>
+                  <a:srgbClr val="222222"/>
+                </a:solidFill>
+                <a:latin typeface="Calibri"/>
+              </a:rPr>
+              <a:t>1. List the tasks: (a) generate three thumbnail sizes, (b) scan the image for prohibited content, (c) save the original to storage.</a:t>
+            </a:r>
+          </a:p>
+          <a:p>
+            <a:pPr lvl="1"/>
+            <a:r>
+              <a:rPr sz="1900" b="0">
+                <a:solidFill>
+                  <a:srgbClr val="222222"/>
+                </a:solidFill>
+                <a:latin typeface="Calibri"/>
+              </a:rPr>
+              <a:t>2. Run the dependency test: all three work from the same uploaded image and none consumes another's output, so they are independent.</a:t>
+            </a:r>
+          </a:p>
+          <a:p>
+            <a:pPr lvl="1"/>
+            <a:r>
+              <a:rPr sz="1900" b="0">
+                <a:solidFill>
+                  <a:srgbClr val="222222"/>
+                </a:solidFill>
+                <a:latin typeface="Calibri"/>
+              </a:rPr>
+              <a:t>3. Decision: (a), (b) and (c) can run concurrently.</a:t>
+            </a:r>
+          </a:p>
+          <a:p>
+            <a:pPr lvl="1"/>
+            <a:r>
+              <a:rPr sz="1900" b="0">
+                <a:solidFill>
+                  <a:srgbClr val="222222"/>
+                </a:solidFill>
+                <a:latin typeface="Calibri"/>
+              </a:rPr>
+              <a:t>4. Note the sequencing point that remains: publishing must wait for the scan result, so publish stays sequential after (b).</a:t>
+            </a:r>
+          </a:p>
+          <a:p>
+            <a:pPr lvl="1"/>
+            <a:r>
+              <a:rPr sz="1900" b="0">
+                <a:solidFill>
+                  <a:srgbClr val="222222"/>
+                </a:solidFill>
+                <a:latin typeface="Calibri"/>
+              </a:rPr>
+              <a:t>5. Benefit: the upload completes sooner and the app stays responsive, using several cores at once.</a:t>
+            </a:r>
+          </a:p>
+          <a:p>
+            <a:pPr lvl="1"/>
+            <a:r>
+              <a:rPr sz="1900" b="0">
+                <a:solidFill>
+                  <a:srgbClr val="222222"/>
+                </a:solidFill>
+                <a:latin typeface="Calibri"/>
+              </a:rPr>
+              <a:t>6. Trade-off: if the tasks write status updates to one shared record, updates can race; coordination code is needed, and a timing bug would be hard to reproduce.</a:t>
+            </a:r>
+          </a:p>
+        </p:txBody>
+      </p:sp>
+    </p:spTree>
+  </p:cSld>
+  <p:clrMapOvr>
+    <a:masterClrMapping/>
+  </p:clrMapOvr>
+</p:sld>
+</file>
+
+<file path=ppt/slides/slide17.xml><?xml version="1.0" encoding="utf-8"?>
+<p:sld xmlns:a="http://schemas.openxmlformats.org/drawingml/2006/main" xmlns:p="http://schemas.openxmlformats.org/presentationml/2006/main" xmlns:r="http://schemas.openxmlformats.org/officeDocument/2006/relationships">
+  <p:cSld>
+    <p:bg>
+      <p:bgPr>
+        <a:solidFill>
+          <a:srgbClr val="FFFFFF"/>
+        </a:solidFill>
+        <a:effectLst/>
+      </p:bgPr>
+    </p:bg>
+    <p:spTree>
+      <p:nvGrpSpPr>
+        <p:cNvPr id="1" name=""/>
+        <p:cNvGrpSpPr/>
+        <p:nvPr/>
+      </p:nvGrpSpPr>
+      <p:grpSpPr/>
+      <p:sp>
+        <p:nvSpPr>
+          <p:cNvPr id="2" name="TextBox 1"/>
+          <p:cNvSpPr txBox="1"/>
+          <p:nvPr/>
+        </p:nvSpPr>
+        <p:spPr>
+          <a:xfrm>
+            <a:off x="548640" y="274320"/>
+            <a:ext cx="11064240" cy="822960"/>
+          </a:xfrm>
+          <a:prstGeom prst="rect">
+            <a:avLst/>
+          </a:prstGeom>
+          <a:noFill/>
+        </p:spPr>
+        <p:txBody>
+          <a:bodyPr wrap="square">
+            <a:spAutoFit/>
+          </a:bodyPr>
+          <a:lstStyle/>
+          <a:p>
+            <a:r>
+              <a:rPr sz="3000" b="1" i="0">
+                <a:solidFill>
+                  <a:srgbClr val="2B6CB0"/>
+                </a:solidFill>
+                <a:latin typeface="Calibri"/>
+              </a:rPr>
+              <a:t>Worked example 2</a:t>
+            </a:r>
+          </a:p>
+        </p:txBody>
+      </p:sp>
+      <p:sp>
+        <p:nvSpPr>
+          <p:cNvPr id="3" name="TextBox 2"/>
+          <p:cNvSpPr txBox="1"/>
+          <p:nvPr/>
+        </p:nvSpPr>
+        <p:spPr>
+          <a:xfrm>
+            <a:off x="640080" y="1280160"/>
+            <a:ext cx="10881360" cy="5120640"/>
+          </a:xfrm>
+          <a:prstGeom prst="rect">
+            <a:avLst/>
+          </a:prstGeom>
+          <a:noFill/>
+        </p:spPr>
+        <p:txBody>
+          <a:bodyPr wrap="square">
+            <a:spAutoFit/>
+          </a:bodyPr>
+          <a:lstStyle/>
+          <a:p>
+            <a:pPr/>
+            <a:r>
+              <a:rPr sz="2200" b="1">
+                <a:solidFill>
+                  <a:srgbClr val="2B6CB0"/>
+                </a:solidFill>
+                <a:latin typeface="Calibri"/>
+              </a:rPr>
+              <a:t>Dependency analysis of a sales report</a:t>
+            </a:r>
+          </a:p>
+          <a:p>
+            <a:pPr lvl="1"/>
+            <a:r>
+              <a:rPr sz="1900" b="0">
+                <a:solidFill>
+                  <a:srgbClr val="222222"/>
+                </a:solidFill>
+                <a:latin typeface="Calibri"/>
+              </a:rPr>
+              <a:t>1. The job: total each of five regions' sales, then combine the five totals into a grand total.</a:t>
+            </a:r>
+          </a:p>
+          <a:p>
+            <a:pPr lvl="1"/>
+            <a:r>
+              <a:rPr sz="1900" b="0">
+                <a:solidFill>
+                  <a:srgbClr val="222222"/>
+                </a:solidFill>
+                <a:latin typeface="Calibri"/>
+              </a:rPr>
+              <a:t>2. Dependency test on the regional totals: each region's total uses only that region's data, so the five totals are mutually independent.</a:t>
+            </a:r>
+          </a:p>
+          <a:p>
+            <a:pPr lvl="1"/>
+            <a:r>
+              <a:rPr sz="1900" b="0">
+                <a:solidFill>
+                  <a:srgbClr val="222222"/>
+                </a:solidFill>
+                <a:latin typeface="Calibri"/>
+              </a:rPr>
+              <a:t>3. Decision: the five regional totals can be computed concurrently, one per core.</a:t>
+            </a:r>
+          </a:p>
+          <a:p>
+            <a:pPr lvl="1"/>
+            <a:r>
+              <a:rPr sz="1900" b="0">
+                <a:solidFill>
+                  <a:srgbClr val="222222"/>
+                </a:solidFill>
+                <a:latin typeface="Calibri"/>
+              </a:rPr>
+              <a:t>4. Dependency test on the grand total: it consumes all five regional outputs, a data dependency.</a:t>
+            </a:r>
+          </a:p>
+          <a:p>
+            <a:pPr lvl="1"/>
+            <a:r>
+              <a:rPr sz="1900" b="0">
+                <a:solidFill>
+                  <a:srgbClr val="222222"/>
+                </a:solidFill>
+                <a:latin typeface="Calibri"/>
+              </a:rPr>
+              <a:t>5. Decision: the grand total must run after every regional task has finished: a synchronisation point.</a:t>
+            </a:r>
+          </a:p>
+          <a:p>
+            <a:pPr lvl="1"/>
+            <a:r>
+              <a:rPr sz="1900" b="0">
+                <a:solidFill>
+                  <a:srgbClr val="222222"/>
+                </a:solidFill>
+                <a:latin typeface="Calibri"/>
+              </a:rPr>
+              <a:t>6. Overall time falls from five regional jobs in a row to roughly the slowest single region plus the quick final sum.</a:t>
+            </a:r>
+          </a:p>
+        </p:txBody>
+      </p:sp>
+    </p:spTree>
+  </p:cSld>
+  <p:clrMapOvr>
+    <a:masterClrMapping/>
+  </p:clrMapOvr>
+</p:sld>
+</file>
+
+<file path=ppt/slides/slide18.xml><?xml version="1.0" encoding="utf-8"?>
+<p:sld xmlns:a="http://schemas.openxmlformats.org/drawingml/2006/main" xmlns:p="http://schemas.openxmlformats.org/presentationml/2006/main" xmlns:r="http://schemas.openxmlformats.org/officeDocument/2006/relationships">
+  <p:cSld>
+    <p:bg>
+      <p:bgPr>
+        <a:solidFill>
+          <a:srgbClr val="FFFFFF"/>
+        </a:solidFill>
+        <a:effectLst/>
+      </p:bgPr>
+    </p:bg>
+    <p:spTree>
+      <p:nvGrpSpPr>
+        <p:cNvPr id="1" name=""/>
+        <p:cNvGrpSpPr/>
+        <p:nvPr/>
+      </p:nvGrpSpPr>
+      <p:grpSpPr/>
+      <p:sp>
+        <p:nvSpPr>
+          <p:cNvPr id="2" name="TextBox 1"/>
+          <p:cNvSpPr txBox="1"/>
+          <p:nvPr/>
+        </p:nvSpPr>
+        <p:spPr>
+          <a:xfrm>
+            <a:off x="548640" y="274320"/>
+            <a:ext cx="11064240" cy="822960"/>
+          </a:xfrm>
+          <a:prstGeom prst="rect">
+            <a:avLst/>
+          </a:prstGeom>
+          <a:noFill/>
+        </p:spPr>
+        <p:txBody>
+          <a:bodyPr wrap="square">
+            <a:spAutoFit/>
+          </a:bodyPr>
+          <a:lstStyle/>
+          <a:p>
+            <a:r>
+              <a:rPr sz="3000" b="1" i="0">
+                <a:solidFill>
+                  <a:srgbClr val="2B6CB0"/>
+                </a:solidFill>
+                <a:latin typeface="Calibri"/>
+              </a:rPr>
+              <a:t>Worked example 3</a:t>
+            </a:r>
+          </a:p>
+        </p:txBody>
+      </p:sp>
+      <p:sp>
+        <p:nvSpPr>
+          <p:cNvPr id="3" name="TextBox 2"/>
+          <p:cNvSpPr txBox="1"/>
+          <p:nvPr/>
+        </p:nvSpPr>
+        <p:spPr>
+          <a:xfrm>
+            <a:off x="640080" y="1280160"/>
+            <a:ext cx="10881360" cy="5120640"/>
+          </a:xfrm>
+          <a:prstGeom prst="rect">
+            <a:avLst/>
+          </a:prstGeom>
+          <a:noFill/>
+        </p:spPr>
+        <p:txBody>
+          <a:bodyPr wrap="square">
+            <a:spAutoFit/>
+          </a:bodyPr>
+          <a:lstStyle/>
+          <a:p>
+            <a:pPr/>
+            <a:r>
+              <a:rPr sz="2200" b="1">
+                <a:solidFill>
+                  <a:srgbClr val="2B6CB0"/>
+                </a:solidFill>
+                <a:latin typeface="Calibri"/>
+              </a:rPr>
+              <a:t>How a race condition sells one seat twice</a:t>
+            </a:r>
+          </a:p>
+          <a:p>
+            <a:pPr lvl="1"/>
+            <a:r>
+              <a:rPr sz="1900" b="0">
+                <a:solidFill>
+                  <a:srgbClr val="222222"/>
+                </a:solidFill>
+                <a:latin typeface="Calibri"/>
+              </a:rPr>
+              <a:t>1. A booking system stores seatsLeft = 1. Two customers, X and Y, click Buy at nearly the same moment.</a:t>
+            </a:r>
+          </a:p>
+          <a:p>
+            <a:pPr lvl="1"/>
+            <a:r>
+              <a:rPr sz="1900" b="0">
+                <a:solidFill>
+                  <a:srgbClr val="222222"/>
+                </a:solidFill>
+                <a:latin typeface="Calibri"/>
+              </a:rPr>
+              <a:t>2. Task X reads seatsLeft and sees 1: the seat looks available.</a:t>
+            </a:r>
+          </a:p>
+          <a:p>
+            <a:pPr lvl="1"/>
+            <a:r>
+              <a:rPr sz="1900" b="0">
+                <a:solidFill>
+                  <a:srgbClr val="222222"/>
+                </a:solidFill>
+                <a:latin typeface="Calibri"/>
+              </a:rPr>
+              <a:t>3. Before X saves anything, task Y also reads seatsLeft and also sees 1.</a:t>
+            </a:r>
+          </a:p>
+          <a:p>
+            <a:pPr lvl="1"/>
+            <a:r>
+              <a:rPr sz="1900" b="0">
+                <a:solidFill>
+                  <a:srgbClr val="222222"/>
+                </a:solidFill>
+                <a:latin typeface="Calibri"/>
+              </a:rPr>
+              <a:t>4. X writes seatsLeft = 0 and issues a ticket; Y, working from its earlier read, also writes 0 and issues a ticket.</a:t>
+            </a:r>
+          </a:p>
+          <a:p>
+            <a:pPr lvl="1"/>
+            <a:r>
+              <a:rPr sz="1900" b="0">
+                <a:solidFill>
+                  <a:srgbClr val="222222"/>
+                </a:solidFill>
+                <a:latin typeface="Calibri"/>
+              </a:rPr>
+              <a:t>5. Two tickets exist for one seat. Run again with slightly different timing and Y might see 0 and be refused: the outcome depends on timing, which is what makes it a race condition.</a:t>
+            </a:r>
+          </a:p>
+          <a:p>
+            <a:pPr lvl="1"/>
+            <a:r>
+              <a:rPr sz="1900" b="0">
+                <a:solidFill>
+                  <a:srgbClr val="222222"/>
+                </a:solidFill>
+                <a:latin typeface="Calibri"/>
+              </a:rPr>
+              <a:t>6. Fix: force the check-and-book step to happen one customer at a time (taking turns on the shared data); the trade-off is that other customers wait, reintroducing a queue.</a:t>
+            </a:r>
+          </a:p>
+        </p:txBody>
+      </p:sp>
+    </p:spTree>
+  </p:cSld>
+  <p:clrMapOvr>
+    <a:masterClrMapping/>
+  </p:clrMapOvr>
+</p:sld>
+</file>
+
+<file path=ppt/slides/slide19.xml><?xml version="1.0" encoding="utf-8"?>
+<p:sld xmlns:a="http://schemas.openxmlformats.org/drawingml/2006/main" xmlns:p="http://schemas.openxmlformats.org/presentationml/2006/main" xmlns:r="http://schemas.openxmlformats.org/officeDocument/2006/relationships">
+  <p:cSld>
+    <p:bg>
+      <p:bgPr>
+        <a:solidFill>
+          <a:srgbClr val="FFFFFF"/>
+        </a:solidFill>
+        <a:effectLst/>
+      </p:bgPr>
+    </p:bg>
+    <p:spTree>
+      <p:nvGrpSpPr>
+        <p:cNvPr id="1" name=""/>
+        <p:cNvGrpSpPr/>
+        <p:nvPr/>
+      </p:nvGrpSpPr>
+      <p:grpSpPr/>
+      <p:sp>
+        <p:nvSpPr>
+          <p:cNvPr id="2" name="TextBox 1"/>
+          <p:cNvSpPr txBox="1"/>
+          <p:nvPr/>
+        </p:nvSpPr>
+        <p:spPr>
+          <a:xfrm>
+            <a:off x="548640" y="274320"/>
+            <a:ext cx="11064240" cy="822960"/>
+          </a:xfrm>
+          <a:prstGeom prst="rect">
+            <a:avLst/>
+          </a:prstGeom>
+          <a:noFill/>
+        </p:spPr>
+        <p:txBody>
+          <a:bodyPr wrap="square">
+            <a:spAutoFit/>
+          </a:bodyPr>
+          <a:lstStyle/>
+          <a:p>
+            <a:r>
+              <a:rPr sz="3000" b="1" i="0">
+                <a:solidFill>
+                  <a:srgbClr val="2B6CB0"/>
+                </a:solidFill>
+                <a:latin typeface="Calibri"/>
+              </a:rPr>
+              <a:t>Activity 1</a:t>
+            </a:r>
+          </a:p>
+        </p:txBody>
+      </p:sp>
+      <p:sp>
+        <p:nvSpPr>
+          <p:cNvPr id="3" name="TextBox 2"/>
+          <p:cNvSpPr txBox="1"/>
+          <p:nvPr/>
+        </p:nvSpPr>
+        <p:spPr>
+          <a:xfrm>
+            <a:off x="640080" y="1280160"/>
+            <a:ext cx="10881360" cy="5120640"/>
+          </a:xfrm>
+          <a:prstGeom prst="rect">
+            <a:avLst/>
+          </a:prstGeom>
+          <a:noFill/>
+        </p:spPr>
+        <p:txBody>
+          <a:bodyPr wrap="square">
+            <a:spAutoFit/>
+          </a:bodyPr>
+          <a:lstStyle/>
+          <a:p>
+            <a:pPr/>
+            <a:r>
+              <a:rPr sz="2200" b="1">
+                <a:solidFill>
+                  <a:srgbClr val="2B6CB0"/>
+                </a:solidFill>
+                <a:latin typeface="Calibri"/>
+              </a:rPr>
+              <a:t>Kitchen Brigade (concurrency role-play)  (20 min)</a:t>
+            </a:r>
+          </a:p>
+          <a:p>
+            <a:pPr lvl="1"/>
+            <a:r>
+              <a:rPr sz="2000" b="0">
+                <a:solidFill>
+                  <a:srgbClr val="222222"/>
+                </a:solidFill>
+                <a:latin typeface="Calibri"/>
+              </a:rPr>
+              <a:t>Groups of 6: a recipe card for a two-course order (chop vegetables, simmer soup 5 'minutes', fry chicken 4 'minutes' in the pan, boil rice 3 'minutes', plate soup, plate main, garnish both), where one minute is 20 real seconds; roles: Head Chef (coordinates, may not cook), cooks, Inspector (records timings); exactly one frying-pan card per kitchen.</a:t>
+            </a:r>
+          </a:p>
+          <a:p>
+            <a:pPr lvl="1"/>
+            <a:r>
+              <a:rPr sz="2000" b="0">
+                <a:solidFill>
+                  <a:srgbClr val="222222"/>
+                </a:solidFill>
+                <a:latin typeface="Calibri"/>
+              </a:rPr>
+              <a:t>Round 1, single core: one cook does every task in sequence while others watch; the Inspector times the full order.</a:t>
+            </a:r>
+          </a:p>
+          <a:p>
+            <a:pPr lvl="1"/>
+            <a:r>
+              <a:rPr sz="2000" b="0">
+                <a:solidFill>
+                  <a:srgbClr val="222222"/>
+                </a:solidFill>
+                <a:latin typeface="Calibri"/>
+              </a:rPr>
+              <a:t>Round 2, parallel: all cooks work at once with the Head Chef assigning tasks. Independent tasks (chop, boil rice, fry) overlap; the Inspector records the new time and the dependencies that still forced waiting (soup must simmer before plating; garnish last).</a:t>
+            </a:r>
+          </a:p>
+          <a:p>
+            <a:pPr lvl="1"/>
+            <a:r>
+              <a:rPr sz="2000" b="0">
+                <a:solidFill>
+                  <a:srgbClr val="222222"/>
+                </a:solidFill>
+                <a:latin typeface="Calibri"/>
+              </a:rPr>
+              <a:t>Round 3, the shared pan: add a second order that also needs frying. If one cook grabs the pan mid-fry, the first dish is ruined: the result depends on who grabbed it when. Name it: a race condition on a shared resource.</a:t>
+            </a:r>
+          </a:p>
+          <a:p>
+            <a:pPr lvl="1"/>
+            <a:r>
+              <a:rPr sz="2000" b="0">
+                <a:solidFill>
+                  <a:srgbClr val="222222"/>
+                </a:solidFill>
+                <a:latin typeface="Calibri"/>
+              </a:rPr>
+              <a:t>Debrief against the spec: benefits (faster, better use of many cooks, responsiveness) versus trade-offs (coordination, race conditions, waiting for the pan, plating inherently sequential).</a:t>
+            </a:r>
+          </a:p>
+          <a:p>
+            <a:pPr/>
+            <a:r>
+              <a:rPr sz="1800" b="0">
                 <a:solidFill>
                   <a:srgbClr val="B76E00"/>
                 </a:solidFill>
                 <a:latin typeface="Calibri"/>
               </a:rPr>
-              <a:t>Answer: B — scene 1 and scene 2 audio share no data so they are independent; A has a dependency (export needs the rendered clip).</a:t>
-            </a:r>
-          </a:p>
-          <a:p>
-            <a:r>
-              <a:rPr sz="2200" b="1">
-                <a:solidFill>
-                  <a:srgbClr val="222222"/>
-                </a:solidFill>
-                <a:latin typeface="Calibri"/>
-              </a:rPr>
-              <a:t>2. Two threads update a shared bank balance without coordination and the final figure depends on timing. Name the problem.</a:t>
-            </a:r>
-          </a:p>
-          <a:p>
-            <a:pPr lvl="1"/>
-            <a:r>
-              <a:rPr sz="1800" i="1">
-                <a:solidFill>
-                  <a:srgbClr val="B76E00"/>
-                </a:solidFill>
-                <a:latin typeface="Calibri"/>
-              </a:rPr>
-              <a:t>Answer: A race condition.</a:t>
-            </a:r>
-          </a:p>
-          <a:p>
-            <a:r>
-              <a:rPr sz="2200" b="1">
-                <a:solidFill>
-                  <a:srgbClr val="222222"/>
-                </a:solidFill>
-                <a:latin typeface="Calibri"/>
-              </a:rPr>
-              <a:t>3. Give one reason concurrency is not always faster.</a:t>
-            </a:r>
-          </a:p>
-          <a:p>
-            <a:pPr lvl="1"/>
-            <a:r>
-              <a:rPr sz="1800" i="1">
-                <a:solidFill>
-                  <a:srgbClr val="B76E00"/>
-                </a:solidFill>
-                <a:latin typeface="Calibri"/>
-              </a:rPr>
-              <a:t>Answer: On a single core it is only time-slicing, not true parallelism; thread overhead and inherently sequential steps also limit any gain.</a:t>
+              <a:t>Stretch: The Inspector computes the theoretical minimum time (the longest chain of dependent tasks) and the group explains why adding a seventh cook would barely help.</a:t>
             </a:r>
           </a:p>
         </p:txBody>
@@ -3974,7 +4784,7 @@
                 </a:solidFill>
                 <a:latin typeface="Calibri"/>
               </a:rPr>
-              <a:t>Identify tasks that can run concurrently because they have no data dependency.</a:t>
+              <a:t>I can explain what it means for parts of a problem to be carried out concurrently.</a:t>
             </a:r>
           </a:p>
           <a:p>
@@ -3986,7 +4796,7 @@
                 </a:solidFill>
                 <a:latin typeface="Calibri"/>
               </a:rPr>
-              <a:t>Explain the benefits and trade-offs of concurrency, including race conditions and deadlock.</a:t>
+              <a:t>I can identify which tasks in a scenario can run at the same time by checking for data dependencies.</a:t>
             </a:r>
           </a:p>
           <a:p>
@@ -3998,7 +4808,1477 @@
                 </a:solidFill>
                 <a:latin typeface="Calibri"/>
               </a:rPr>
-              <a:t>Apply concurrent thinking to an unseen scenario, weighing one benefit against one trade-off.</a:t>
+              <a:t>I can weigh the benefits of concurrency (speed, responsiveness, hardware use) against its trade-offs (shared data, coordination, testing).</a:t>
+            </a:r>
+          </a:p>
+          <a:p>
+            <a:pPr lvl="1"/>
+            <a:r>
+              <a:rPr sz="2200" b="0">
+                <a:solidFill>
+                  <a:srgbClr val="222222"/>
+                </a:solidFill>
+                <a:latin typeface="Calibri"/>
+              </a:rPr>
+              <a:t>I can distinguish true parallel processing on multiple cores from concurrency by time-slicing on one core.</a:t>
+            </a:r>
+          </a:p>
+        </p:txBody>
+      </p:sp>
+    </p:spTree>
+  </p:cSld>
+  <p:clrMapOvr>
+    <a:masterClrMapping/>
+  </p:clrMapOvr>
+</p:sld>
+</file>
+
+<file path=ppt/slides/slide20.xml><?xml version="1.0" encoding="utf-8"?>
+<p:sld xmlns:a="http://schemas.openxmlformats.org/drawingml/2006/main" xmlns:p="http://schemas.openxmlformats.org/presentationml/2006/main" xmlns:r="http://schemas.openxmlformats.org/officeDocument/2006/relationships">
+  <p:cSld>
+    <p:bg>
+      <p:bgPr>
+        <a:solidFill>
+          <a:srgbClr val="FFFFFF"/>
+        </a:solidFill>
+        <a:effectLst/>
+      </p:bgPr>
+    </p:bg>
+    <p:spTree>
+      <p:nvGrpSpPr>
+        <p:cNvPr id="1" name=""/>
+        <p:cNvGrpSpPr/>
+        <p:nvPr/>
+      </p:nvGrpSpPr>
+      <p:grpSpPr/>
+      <p:sp>
+        <p:nvSpPr>
+          <p:cNvPr id="2" name="TextBox 1"/>
+          <p:cNvSpPr txBox="1"/>
+          <p:nvPr/>
+        </p:nvSpPr>
+        <p:spPr>
+          <a:xfrm>
+            <a:off x="548640" y="274320"/>
+            <a:ext cx="11064240" cy="822960"/>
+          </a:xfrm>
+          <a:prstGeom prst="rect">
+            <a:avLst/>
+          </a:prstGeom>
+          <a:noFill/>
+        </p:spPr>
+        <p:txBody>
+          <a:bodyPr wrap="square">
+            <a:spAutoFit/>
+          </a:bodyPr>
+          <a:lstStyle/>
+          <a:p>
+            <a:r>
+              <a:rPr sz="3000" b="1" i="0">
+                <a:solidFill>
+                  <a:srgbClr val="2B6CB0"/>
+                </a:solidFill>
+                <a:latin typeface="Calibri"/>
+              </a:rPr>
+              <a:t>Activity 2</a:t>
+            </a:r>
+          </a:p>
+        </p:txBody>
+      </p:sp>
+      <p:sp>
+        <p:nvSpPr>
+          <p:cNvPr id="3" name="TextBox 2"/>
+          <p:cNvSpPr txBox="1"/>
+          <p:nvPr/>
+        </p:nvSpPr>
+        <p:spPr>
+          <a:xfrm>
+            <a:off x="640080" y="1280160"/>
+            <a:ext cx="10881360" cy="5120640"/>
+          </a:xfrm>
+          <a:prstGeom prst="rect">
+            <a:avLst/>
+          </a:prstGeom>
+          <a:noFill/>
+        </p:spPr>
+        <p:txBody>
+          <a:bodyPr wrap="square">
+            <a:spAutoFit/>
+          </a:bodyPr>
+          <a:lstStyle/>
+          <a:p>
+            <a:pPr/>
+            <a:r>
+              <a:rPr sz="2200" b="1">
+                <a:solidFill>
+                  <a:srgbClr val="2B6CB0"/>
+                </a:solidFill>
+                <a:latin typeface="Calibri"/>
+              </a:rPr>
+              <a:t>Parallel or Sequential? Dependency Detective  (15 min)</a:t>
+            </a:r>
+          </a:p>
+          <a:p>
+            <a:pPr lvl="1"/>
+            <a:r>
+              <a:rPr sz="2000" b="0">
+                <a:solidFill>
+                  <a:srgbClr val="222222"/>
+                </a:solidFill>
+                <a:latin typeface="Calibri"/>
+              </a:rPr>
+              <a:t>Pairs sort task-pair cards into Can run concurrently or Must stay sequential, writing the data dependency for every sequential verdict.</a:t>
+            </a:r>
+          </a:p>
+          <a:p>
+            <a:pPr lvl="1"/>
+            <a:r>
+              <a:rPr sz="2000" b="0">
+                <a:solidFill>
+                  <a:srgbClr val="222222"/>
+                </a:solidFill>
+                <a:latin typeface="Calibri"/>
+              </a:rPr>
+              <a:t>Web page load: (download image A / download image B), (fetch the HTML / render the HTML), (download CSS / download JS).</a:t>
+            </a:r>
+          </a:p>
+          <a:p>
+            <a:pPr lvl="1"/>
+            <a:r>
+              <a:rPr sz="2000" b="0">
+                <a:solidFill>
+                  <a:srgbClr val="222222"/>
+                </a:solidFill>
+                <a:latin typeface="Calibri"/>
+              </a:rPr>
+              <a:t>Results day: (print certificates / stuff envelopes with those certificates), (calculate Maths grades / calculate CS grades), (calculate grades / publish grades online).</a:t>
+            </a:r>
+          </a:p>
+          <a:p>
+            <a:pPr lvl="1"/>
+            <a:r>
+              <a:rPr sz="2000" b="0">
+                <a:solidFill>
+                  <a:srgbClr val="222222"/>
+                </a:solidFill>
+                <a:latin typeface="Calibri"/>
+              </a:rPr>
+              <a:t>Game frame: (update enemy AI / play background music), (move sprites / detect collisions), (render this frame / compute next frame's physics — the trick card).</a:t>
+            </a:r>
+          </a:p>
+          <a:p>
+            <a:pPr lvl="1"/>
+            <a:r>
+              <a:rPr sz="2000" b="0">
+                <a:solidFill>
+                  <a:srgbClr val="222222"/>
+                </a:solidFill>
+                <a:latin typeface="Calibri"/>
+              </a:rPr>
+              <a:t>Answers: concurrent pairs are image A/B, CSS/JS, Maths/CS grades, AI/music, and render/next-physics (different frames, so no dependency); sequential pairs are fetch before render, print before stuff, calculate before publish, move before collision detection (collisions need the new positions).</a:t>
+            </a:r>
+          </a:p>
+          <a:p>
+            <a:pPr/>
+            <a:r>
+              <a:rPr sz="1800" b="0">
+                <a:solidFill>
+                  <a:srgbClr val="B76E00"/>
+                </a:solidFill>
+                <a:latin typeface="Calibri"/>
+              </a:rPr>
+              <a:t>Stretch: For each concurrent pair, state what must happen at the end (results synchronised: the page renders only when all assets arrive) and whether it would actually be faster on a single core.</a:t>
+            </a:r>
+          </a:p>
+        </p:txBody>
+      </p:sp>
+    </p:spTree>
+  </p:cSld>
+  <p:clrMapOvr>
+    <a:masterClrMapping/>
+  </p:clrMapOvr>
+</p:sld>
+</file>
+
+<file path=ppt/slides/slide21.xml><?xml version="1.0" encoding="utf-8"?>
+<p:sld xmlns:a="http://schemas.openxmlformats.org/drawingml/2006/main" xmlns:p="http://schemas.openxmlformats.org/presentationml/2006/main" xmlns:r="http://schemas.openxmlformats.org/officeDocument/2006/relationships">
+  <p:cSld>
+    <p:bg>
+      <p:bgPr>
+        <a:solidFill>
+          <a:srgbClr val="FFFFFF"/>
+        </a:solidFill>
+        <a:effectLst/>
+      </p:bgPr>
+    </p:bg>
+    <p:spTree>
+      <p:nvGrpSpPr>
+        <p:cNvPr id="1" name=""/>
+        <p:cNvGrpSpPr/>
+        <p:nvPr/>
+      </p:nvGrpSpPr>
+      <p:grpSpPr/>
+      <p:sp>
+        <p:nvSpPr>
+          <p:cNvPr id="2" name="TextBox 1"/>
+          <p:cNvSpPr txBox="1"/>
+          <p:nvPr/>
+        </p:nvSpPr>
+        <p:spPr>
+          <a:xfrm>
+            <a:off x="548640" y="274320"/>
+            <a:ext cx="11064240" cy="822960"/>
+          </a:xfrm>
+          <a:prstGeom prst="rect">
+            <a:avLst/>
+          </a:prstGeom>
+          <a:noFill/>
+        </p:spPr>
+        <p:txBody>
+          <a:bodyPr wrap="square">
+            <a:spAutoFit/>
+          </a:bodyPr>
+          <a:lstStyle/>
+          <a:p>
+            <a:r>
+              <a:rPr sz="3000" b="1" i="0">
+                <a:solidFill>
+                  <a:srgbClr val="2B6CB0"/>
+                </a:solidFill>
+                <a:latin typeface="Calibri"/>
+              </a:rPr>
+              <a:t>Activity 3</a:t>
+            </a:r>
+          </a:p>
+        </p:txBody>
+      </p:sp>
+      <p:sp>
+        <p:nvSpPr>
+          <p:cNvPr id="3" name="TextBox 2"/>
+          <p:cNvSpPr txBox="1"/>
+          <p:nvPr/>
+        </p:nvSpPr>
+        <p:spPr>
+          <a:xfrm>
+            <a:off x="640080" y="1280160"/>
+            <a:ext cx="10881360" cy="5120640"/>
+          </a:xfrm>
+          <a:prstGeom prst="rect">
+            <a:avLst/>
+          </a:prstGeom>
+          <a:noFill/>
+        </p:spPr>
+        <p:txBody>
+          <a:bodyPr wrap="square">
+            <a:spAutoFit/>
+          </a:bodyPr>
+          <a:lstStyle/>
+          <a:p>
+            <a:pPr/>
+            <a:r>
+              <a:rPr sz="2200" b="1">
+                <a:solidFill>
+                  <a:srgbClr val="2B6CB0"/>
+                </a:solidFill>
+                <a:latin typeface="Calibri"/>
+              </a:rPr>
+              <a:t>The Concurrency Continuum  (12 min)</a:t>
+            </a:r>
+          </a:p>
+          <a:p>
+            <a:pPr lvl="1"/>
+            <a:r>
+              <a:rPr sz="2000" b="0">
+                <a:solidFill>
+                  <a:srgbClr val="222222"/>
+                </a:solidFill>
+                <a:latin typeface="Calibri"/>
+              </a:rPr>
+              <a:t>Tape a line across the room labelled Definitely make it concurrent at one end and Keep it sequential at the other.</a:t>
+            </a:r>
+          </a:p>
+          <a:p>
+            <a:pPr lvl="1"/>
+            <a:r>
+              <a:rPr sz="2000" b="0">
+                <a:solidFill>
+                  <a:srgbClr val="222222"/>
+                </a:solidFill>
+                <a:latin typeface="Calibri"/>
+              </a:rPr>
+              <a:t>Read each system; students place themselves and justify with a benefit or trade-off when interviewed: (a) a web server handling thousands of requests; (b) a running total of 1000 numbers where each step needs the previous sum; (c) a phone app downloading a file while keeping the UI responsive; (d) two threads updating one shared bank balance; (e) rendering different regions of one movie frame on a 16-core machine; (f) a single-core microcontroller doing two CPU-heavy calculations.</a:t>
+            </a:r>
+          </a:p>
+          <a:p>
+            <a:pPr lvl="1"/>
+            <a:r>
+              <a:rPr sz="2000" b="0">
+                <a:solidFill>
+                  <a:srgbClr val="222222"/>
+                </a:solidFill>
+                <a:latin typeface="Calibri"/>
+              </a:rPr>
+              <a:t>Expected clustering: (a), (c), (e) concurrent (throughput, responsiveness, true parallelism); (b) sequential (each step depends on the previous output); (d) sequential-leaning (race-condition risk on shared data); (f) sequential (one core time-slices with overhead, no speed-up).</a:t>
+            </a:r>
+          </a:p>
+          <a:p>
+            <a:pPr lvl="1"/>
+            <a:r>
+              <a:rPr sz="2000" b="0">
+                <a:solidFill>
+                  <a:srgbClr val="222222"/>
+                </a:solidFill>
+                <a:latin typeface="Calibri"/>
+              </a:rPr>
+              <a:t>Complication round: for (d) add 'protected so only one thread touches the balance at a time' and for (f) add 'one task mostly waits on a slow sensor'; discuss who moves and why.</a:t>
+            </a:r>
+          </a:p>
+          <a:p>
+            <a:pPr lvl="1"/>
+            <a:r>
+              <a:rPr sz="2000" b="0">
+                <a:solidFill>
+                  <a:srgbClr val="222222"/>
+                </a:solidFill>
+                <a:latin typeface="Calibri"/>
+              </a:rPr>
+              <a:t>Exit line: every student states one benefit and one trade-off before sitting down.</a:t>
+            </a:r>
+          </a:p>
+          <a:p>
+            <a:pPr/>
+            <a:r>
+              <a:rPr sz="1800" b="0">
+                <a:solidFill>
+                  <a:srgbClr val="B76E00"/>
+                </a:solidFill>
+                <a:latin typeface="Calibri"/>
+              </a:rPr>
+              <a:t>Stretch: Students at the extremes argue the opposite end for 30 seconds, steelmanning the trade-off table.</a:t>
+            </a:r>
+          </a:p>
+        </p:txBody>
+      </p:sp>
+    </p:spTree>
+  </p:cSld>
+  <p:clrMapOvr>
+    <a:masterClrMapping/>
+  </p:clrMapOvr>
+</p:sld>
+</file>
+
+<file path=ppt/slides/slide22.xml><?xml version="1.0" encoding="utf-8"?>
+<p:sld xmlns:a="http://schemas.openxmlformats.org/drawingml/2006/main" xmlns:p="http://schemas.openxmlformats.org/presentationml/2006/main" xmlns:r="http://schemas.openxmlformats.org/officeDocument/2006/relationships">
+  <p:cSld>
+    <p:bg>
+      <p:bgPr>
+        <a:solidFill>
+          <a:srgbClr val="FFFFFF"/>
+        </a:solidFill>
+        <a:effectLst/>
+      </p:bgPr>
+    </p:bg>
+    <p:spTree>
+      <p:nvGrpSpPr>
+        <p:cNvPr id="1" name=""/>
+        <p:cNvGrpSpPr/>
+        <p:nvPr/>
+      </p:nvGrpSpPr>
+      <p:grpSpPr/>
+      <p:sp>
+        <p:nvSpPr>
+          <p:cNvPr id="2" name="TextBox 1"/>
+          <p:cNvSpPr txBox="1"/>
+          <p:nvPr/>
+        </p:nvSpPr>
+        <p:spPr>
+          <a:xfrm>
+            <a:off x="548640" y="274320"/>
+            <a:ext cx="11064240" cy="822960"/>
+          </a:xfrm>
+          <a:prstGeom prst="rect">
+            <a:avLst/>
+          </a:prstGeom>
+          <a:noFill/>
+        </p:spPr>
+        <p:txBody>
+          <a:bodyPr wrap="square">
+            <a:spAutoFit/>
+          </a:bodyPr>
+          <a:lstStyle/>
+          <a:p>
+            <a:r>
+              <a:rPr sz="3000" b="1" i="0">
+                <a:solidFill>
+                  <a:srgbClr val="2B6CB0"/>
+                </a:solidFill>
+                <a:latin typeface="Calibri"/>
+              </a:rPr>
+              <a:t>Practice (1-4)</a:t>
+            </a:r>
+          </a:p>
+        </p:txBody>
+      </p:sp>
+      <p:sp>
+        <p:nvSpPr>
+          <p:cNvPr id="3" name="TextBox 2"/>
+          <p:cNvSpPr txBox="1"/>
+          <p:nvPr/>
+        </p:nvSpPr>
+        <p:spPr>
+          <a:xfrm>
+            <a:off x="640080" y="1280160"/>
+            <a:ext cx="10881360" cy="5120640"/>
+          </a:xfrm>
+          <a:prstGeom prst="rect">
+            <a:avLst/>
+          </a:prstGeom>
+          <a:noFill/>
+        </p:spPr>
+        <p:txBody>
+          <a:bodyPr wrap="square">
+            <a:spAutoFit/>
+          </a:bodyPr>
+          <a:lstStyle/>
+          <a:p>
+            <a:r>
+              <a:rPr sz="2000" b="1">
+                <a:solidFill>
+                  <a:srgbClr val="222222"/>
+                </a:solidFill>
+                <a:latin typeface="Calibri"/>
+              </a:rPr>
+              <a:t>1. Describe what it means to think concurrently when designing a solution. [2]</a:t>
+            </a:r>
+          </a:p>
+          <a:p>
+            <a:r>
+              <a:rPr sz="2000" b="1">
+                <a:solidFill>
+                  <a:srgbClr val="222222"/>
+                </a:solidFill>
+                <a:latin typeface="Calibri"/>
+              </a:rPr>
+              <a:t>2. A video editor must (i) render clip A, (ii) render clip B, and (iii) join the two rendered clips. State which tasks can run concurrently and which cannot, justifying each answer. [3]</a:t>
+            </a:r>
+          </a:p>
+          <a:p>
+            <a:r>
+              <a:rPr sz="2000" b="1">
+                <a:solidFill>
+                  <a:srgbClr val="222222"/>
+                </a:solidFill>
+                <a:latin typeface="Calibri"/>
+              </a:rPr>
+              <a:t>3. Give two benefits of a program carrying out tasks concurrently. [2]</a:t>
+            </a:r>
+          </a:p>
+          <a:p>
+            <a:r>
+              <a:rPr sz="2000" b="1">
+                <a:solidFill>
+                  <a:srgbClr val="222222"/>
+                </a:solidFill>
+                <a:latin typeface="Calibri"/>
+              </a:rPr>
+              <a:t>4. Explain what a race condition is, using two tasks that both add money to the same account balance as your example. [3]</a:t>
+            </a:r>
+          </a:p>
+        </p:txBody>
+      </p:sp>
+    </p:spTree>
+  </p:cSld>
+  <p:clrMapOvr>
+    <a:masterClrMapping/>
+  </p:clrMapOvr>
+</p:sld>
+</file>
+
+<file path=ppt/slides/slide23.xml><?xml version="1.0" encoding="utf-8"?>
+<p:sld xmlns:a="http://schemas.openxmlformats.org/drawingml/2006/main" xmlns:p="http://schemas.openxmlformats.org/presentationml/2006/main" xmlns:r="http://schemas.openxmlformats.org/officeDocument/2006/relationships">
+  <p:cSld>
+    <p:bg>
+      <p:bgPr>
+        <a:solidFill>
+          <a:srgbClr val="FFFFFF"/>
+        </a:solidFill>
+        <a:effectLst/>
+      </p:bgPr>
+    </p:bg>
+    <p:spTree>
+      <p:nvGrpSpPr>
+        <p:cNvPr id="1" name=""/>
+        <p:cNvGrpSpPr/>
+        <p:nvPr/>
+      </p:nvGrpSpPr>
+      <p:grpSpPr/>
+      <p:sp>
+        <p:nvSpPr>
+          <p:cNvPr id="2" name="TextBox 1"/>
+          <p:cNvSpPr txBox="1"/>
+          <p:nvPr/>
+        </p:nvSpPr>
+        <p:spPr>
+          <a:xfrm>
+            <a:off x="548640" y="274320"/>
+            <a:ext cx="11064240" cy="822960"/>
+          </a:xfrm>
+          <a:prstGeom prst="rect">
+            <a:avLst/>
+          </a:prstGeom>
+          <a:noFill/>
+        </p:spPr>
+        <p:txBody>
+          <a:bodyPr wrap="square">
+            <a:spAutoFit/>
+          </a:bodyPr>
+          <a:lstStyle/>
+          <a:p>
+            <a:r>
+              <a:rPr sz="3000" b="1" i="0">
+                <a:solidFill>
+                  <a:srgbClr val="2B6CB0"/>
+                </a:solidFill>
+                <a:latin typeface="Calibri"/>
+              </a:rPr>
+              <a:t>Practice — answers (1-4)</a:t>
+            </a:r>
+          </a:p>
+        </p:txBody>
+      </p:sp>
+      <p:sp>
+        <p:nvSpPr>
+          <p:cNvPr id="3" name="TextBox 2"/>
+          <p:cNvSpPr txBox="1"/>
+          <p:nvPr/>
+        </p:nvSpPr>
+        <p:spPr>
+          <a:xfrm>
+            <a:off x="640080" y="1280160"/>
+            <a:ext cx="10881360" cy="5120640"/>
+          </a:xfrm>
+          <a:prstGeom prst="rect">
+            <a:avLst/>
+          </a:prstGeom>
+          <a:noFill/>
+        </p:spPr>
+        <p:txBody>
+          <a:bodyPr wrap="square">
+            <a:spAutoFit/>
+          </a:bodyPr>
+          <a:lstStyle/>
+          <a:p>
+            <a:r>
+              <a:rPr sz="2000" b="1">
+                <a:solidFill>
+                  <a:srgbClr val="222222"/>
+                </a:solidFill>
+                <a:latin typeface="Calibri"/>
+              </a:rPr>
+              <a:t>1. Describe what it means to think concurrently when designing a solution. [2]</a:t>
+            </a:r>
+          </a:p>
+          <a:p>
+            <a:pPr lvl="1"/>
+            <a:r>
+              <a:rPr sz="1800" i="1">
+                <a:solidFill>
+                  <a:srgbClr val="B76E00"/>
+                </a:solidFill>
+                <a:latin typeface="Calibri"/>
+              </a:rPr>
+              <a:t>Answer: Identifying the parts of a problem that can be carried out at the same time (1) rather than strictly one after another, e.g. running independent tasks in parallel or interleaved (1).</a:t>
+            </a:r>
+          </a:p>
+          <a:p>
+            <a:r>
+              <a:rPr sz="2000" b="1">
+                <a:solidFill>
+                  <a:srgbClr val="222222"/>
+                </a:solidFill>
+                <a:latin typeface="Calibri"/>
+              </a:rPr>
+              <a:t>2. A video editor must (i) render clip A, (ii) render clip B, and (iii) join the two rendered clips. State which tasks can run concurrently and which cannot, justifying each answer. [3]</a:t>
+            </a:r>
+          </a:p>
+          <a:p>
+            <a:pPr lvl="1"/>
+            <a:r>
+              <a:rPr sz="1800" i="1">
+                <a:solidFill>
+                  <a:srgbClr val="B76E00"/>
+                </a:solidFill>
+                <a:latin typeface="Calibri"/>
+              </a:rPr>
+              <a:t>Answer: (i) and (ii) can run concurrently because they are independent: neither needs the other's output (1). (iii) cannot run with them because it consumes both rendered clips: a data dependency (1), so joining must wait until both renders have finished (1).</a:t>
+            </a:r>
+          </a:p>
+          <a:p>
+            <a:r>
+              <a:rPr sz="2000" b="1">
+                <a:solidFill>
+                  <a:srgbClr val="222222"/>
+                </a:solidFill>
+                <a:latin typeface="Calibri"/>
+              </a:rPr>
+              <a:t>3. Give two benefits of a program carrying out tasks concurrently. [2]</a:t>
+            </a:r>
+          </a:p>
+          <a:p>
+            <a:pPr lvl="1"/>
+            <a:r>
+              <a:rPr sz="1800" i="1">
+                <a:solidFill>
+                  <a:srgbClr val="B76E00"/>
+                </a:solidFill>
+                <a:latin typeface="Calibri"/>
+              </a:rPr>
+              <a:t>Answer: Any two of: it finishes sooner / higher throughput by using multiple cores (1); the program stays responsive, e.g. the interface works during a long task (1); better use of processor time while one task waits on slow input/output (1).</a:t>
+            </a:r>
+          </a:p>
+          <a:p>
+            <a:r>
+              <a:rPr sz="2000" b="1">
+                <a:solidFill>
+                  <a:srgbClr val="222222"/>
+                </a:solidFill>
+                <a:latin typeface="Calibri"/>
+              </a:rPr>
+              <a:t>4. Explain what a race condition is, using two tasks that both add money to the same account balance as your example. [3]</a:t>
+            </a:r>
+          </a:p>
+          <a:p>
+            <a:pPr lvl="1"/>
+            <a:r>
+              <a:rPr sz="1800" i="1">
+                <a:solidFill>
+                  <a:srgbClr val="B76E00"/>
+                </a:solidFill>
+                <a:latin typeface="Calibri"/>
+              </a:rPr>
+              <a:t>Answer: Both tasks read the same starting balance (1); each adds its amount and writes back, so the second write overwrites the first and one deposit is lost (1). The final balance depends on the unpredictable timing/order of the two tasks, which is what makes it a race condition (1).</a:t>
+            </a:r>
+          </a:p>
+        </p:txBody>
+      </p:sp>
+    </p:spTree>
+  </p:cSld>
+  <p:clrMapOvr>
+    <a:masterClrMapping/>
+  </p:clrMapOvr>
+</p:sld>
+</file>
+
+<file path=ppt/slides/slide24.xml><?xml version="1.0" encoding="utf-8"?>
+<p:sld xmlns:a="http://schemas.openxmlformats.org/drawingml/2006/main" xmlns:p="http://schemas.openxmlformats.org/presentationml/2006/main" xmlns:r="http://schemas.openxmlformats.org/officeDocument/2006/relationships">
+  <p:cSld>
+    <p:bg>
+      <p:bgPr>
+        <a:solidFill>
+          <a:srgbClr val="FFFFFF"/>
+        </a:solidFill>
+        <a:effectLst/>
+      </p:bgPr>
+    </p:bg>
+    <p:spTree>
+      <p:nvGrpSpPr>
+        <p:cNvPr id="1" name=""/>
+        <p:cNvGrpSpPr/>
+        <p:nvPr/>
+      </p:nvGrpSpPr>
+      <p:grpSpPr/>
+      <p:sp>
+        <p:nvSpPr>
+          <p:cNvPr id="2" name="TextBox 1"/>
+          <p:cNvSpPr txBox="1"/>
+          <p:nvPr/>
+        </p:nvSpPr>
+        <p:spPr>
+          <a:xfrm>
+            <a:off x="548640" y="274320"/>
+            <a:ext cx="11064240" cy="822960"/>
+          </a:xfrm>
+          <a:prstGeom prst="rect">
+            <a:avLst/>
+          </a:prstGeom>
+          <a:noFill/>
+        </p:spPr>
+        <p:txBody>
+          <a:bodyPr wrap="square">
+            <a:spAutoFit/>
+          </a:bodyPr>
+          <a:lstStyle/>
+          <a:p>
+            <a:r>
+              <a:rPr sz="3000" b="1" i="0">
+                <a:solidFill>
+                  <a:srgbClr val="2B6CB0"/>
+                </a:solidFill>
+                <a:latin typeface="Calibri"/>
+              </a:rPr>
+              <a:t>Practice (5-8)</a:t>
+            </a:r>
+          </a:p>
+        </p:txBody>
+      </p:sp>
+      <p:sp>
+        <p:nvSpPr>
+          <p:cNvPr id="3" name="TextBox 2"/>
+          <p:cNvSpPr txBox="1"/>
+          <p:nvPr/>
+        </p:nvSpPr>
+        <p:spPr>
+          <a:xfrm>
+            <a:off x="640080" y="1280160"/>
+            <a:ext cx="10881360" cy="5120640"/>
+          </a:xfrm>
+          <a:prstGeom prst="rect">
+            <a:avLst/>
+          </a:prstGeom>
+          <a:noFill/>
+        </p:spPr>
+        <p:txBody>
+          <a:bodyPr wrap="square">
+            <a:spAutoFit/>
+          </a:bodyPr>
+          <a:lstStyle/>
+          <a:p>
+            <a:r>
+              <a:rPr sz="2000" b="1">
+                <a:solidFill>
+                  <a:srgbClr val="222222"/>
+                </a:solidFill>
+                <a:latin typeface="Calibri"/>
+              </a:rPr>
+              <a:t>1. Explain the difference between parallel processing and concurrency achieved on a single-core processor. [2]</a:t>
+            </a:r>
+          </a:p>
+          <a:p>
+            <a:r>
+              <a:rPr sz="2000" b="1">
+                <a:solidFill>
+                  <a:srgbClr val="222222"/>
+                </a:solidFill>
+                <a:latin typeface="Calibri"/>
+              </a:rPr>
+              <a:t>2. Give two reasons why a concurrent program is harder to develop and test than a sequential one. [2]</a:t>
+            </a:r>
+          </a:p>
+          <a:p>
+            <a:r>
+              <a:rPr sz="2000" b="1">
+                <a:solidFill>
+                  <a:srgbClr val="222222"/>
+                </a:solidFill>
+                <a:latin typeface="Calibri"/>
+              </a:rPr>
+              <a:t>3. A student claims that making a program concurrent always makes it faster. Evaluate this claim. [3]</a:t>
+            </a:r>
+          </a:p>
+          <a:p>
+            <a:r>
+              <a:rPr sz="2000" b="1">
+                <a:solidFill>
+                  <a:srgbClr val="222222"/>
+                </a:solidFill>
+                <a:latin typeface="Calibri"/>
+              </a:rPr>
+              <a:t>4. A weather app must fetch the radar image, download the 5-day forecast and load a local news feed, then draw the forecast graph. Identify the concurrent tasks and the sequential step, with reasons. [3]</a:t>
+            </a:r>
+          </a:p>
+        </p:txBody>
+      </p:sp>
+    </p:spTree>
+  </p:cSld>
+  <p:clrMapOvr>
+    <a:masterClrMapping/>
+  </p:clrMapOvr>
+</p:sld>
+</file>
+
+<file path=ppt/slides/slide25.xml><?xml version="1.0" encoding="utf-8"?>
+<p:sld xmlns:a="http://schemas.openxmlformats.org/drawingml/2006/main" xmlns:p="http://schemas.openxmlformats.org/presentationml/2006/main" xmlns:r="http://schemas.openxmlformats.org/officeDocument/2006/relationships">
+  <p:cSld>
+    <p:bg>
+      <p:bgPr>
+        <a:solidFill>
+          <a:srgbClr val="FFFFFF"/>
+        </a:solidFill>
+        <a:effectLst/>
+      </p:bgPr>
+    </p:bg>
+    <p:spTree>
+      <p:nvGrpSpPr>
+        <p:cNvPr id="1" name=""/>
+        <p:cNvGrpSpPr/>
+        <p:nvPr/>
+      </p:nvGrpSpPr>
+      <p:grpSpPr/>
+      <p:sp>
+        <p:nvSpPr>
+          <p:cNvPr id="2" name="TextBox 1"/>
+          <p:cNvSpPr txBox="1"/>
+          <p:nvPr/>
+        </p:nvSpPr>
+        <p:spPr>
+          <a:xfrm>
+            <a:off x="548640" y="274320"/>
+            <a:ext cx="11064240" cy="822960"/>
+          </a:xfrm>
+          <a:prstGeom prst="rect">
+            <a:avLst/>
+          </a:prstGeom>
+          <a:noFill/>
+        </p:spPr>
+        <p:txBody>
+          <a:bodyPr wrap="square">
+            <a:spAutoFit/>
+          </a:bodyPr>
+          <a:lstStyle/>
+          <a:p>
+            <a:r>
+              <a:rPr sz="3000" b="1" i="0">
+                <a:solidFill>
+                  <a:srgbClr val="2B6CB0"/>
+                </a:solidFill>
+                <a:latin typeface="Calibri"/>
+              </a:rPr>
+              <a:t>Practice — answers (5-8)</a:t>
+            </a:r>
+          </a:p>
+        </p:txBody>
+      </p:sp>
+      <p:sp>
+        <p:nvSpPr>
+          <p:cNvPr id="3" name="TextBox 2"/>
+          <p:cNvSpPr txBox="1"/>
+          <p:nvPr/>
+        </p:nvSpPr>
+        <p:spPr>
+          <a:xfrm>
+            <a:off x="640080" y="1280160"/>
+            <a:ext cx="10881360" cy="5120640"/>
+          </a:xfrm>
+          <a:prstGeom prst="rect">
+            <a:avLst/>
+          </a:prstGeom>
+          <a:noFill/>
+        </p:spPr>
+        <p:txBody>
+          <a:bodyPr wrap="square">
+            <a:spAutoFit/>
+          </a:bodyPr>
+          <a:lstStyle/>
+          <a:p>
+            <a:r>
+              <a:rPr sz="2000" b="1">
+                <a:solidFill>
+                  <a:srgbClr val="222222"/>
+                </a:solidFill>
+                <a:latin typeface="Calibri"/>
+              </a:rPr>
+              <a:t>1. Explain the difference between parallel processing and concurrency achieved on a single-core processor. [2]</a:t>
+            </a:r>
+          </a:p>
+          <a:p>
+            <a:pPr lvl="1"/>
+            <a:r>
+              <a:rPr sz="1800" i="1">
+                <a:solidFill>
+                  <a:srgbClr val="B76E00"/>
+                </a:solidFill>
+                <a:latin typeface="Calibri"/>
+              </a:rPr>
+              <a:t>Answer: Parallel processing runs tasks literally simultaneously on separate cores (1); a single core time-slices, switching rapidly between tasks so they only appear simultaneous and no extra work is done per second (1).</a:t>
+            </a:r>
+          </a:p>
+          <a:p>
+            <a:r>
+              <a:rPr sz="2000" b="1">
+                <a:solidFill>
+                  <a:srgbClr val="222222"/>
+                </a:solidFill>
+                <a:latin typeface="Calibri"/>
+              </a:rPr>
+              <a:t>2. Give two reasons why a concurrent program is harder to develop and test than a sequential one. [2]</a:t>
+            </a:r>
+          </a:p>
+          <a:p>
+            <a:pPr lvl="1"/>
+            <a:r>
+              <a:rPr sz="1800" i="1">
+                <a:solidFill>
+                  <a:srgbClr val="B76E00"/>
+                </a:solidFill>
+                <a:latin typeface="Calibri"/>
+              </a:rPr>
+              <a:t>Answer: Any two of: access to shared data must be coordinated to avoid race conditions or deadlock (1); timing-dependent bugs may only appear on rare runs, so they are hard to reproduce and debug (1); results from separate tasks must be synchronised and recombined correctly (1).</a:t>
+            </a:r>
+          </a:p>
+          <a:p>
+            <a:r>
+              <a:rPr sz="2000" b="1">
+                <a:solidFill>
+                  <a:srgbClr val="222222"/>
+                </a:solidFill>
+                <a:latin typeface="Calibri"/>
+              </a:rPr>
+              <a:t>3. A student claims that making a program concurrent always makes it faster. Evaluate this claim. [3]</a:t>
+            </a:r>
+          </a:p>
+          <a:p>
+            <a:pPr lvl="1"/>
+            <a:r>
+              <a:rPr sz="1800" i="1">
+                <a:solidFill>
+                  <a:srgbClr val="B76E00"/>
+                </a:solidFill>
+                <a:latin typeface="Calibri"/>
+              </a:rPr>
+              <a:t>Answer: False in general. On a single core, concurrency is only time-slicing, and switching between tasks adds overhead (1). Tasks with data dependencies, such as a running total, are inherently sequential, so they gain nothing (1). Concurrency speeds up independent tasks on multi-core hardware, so the benefit depends on the problem and the hardware (1).</a:t>
+            </a:r>
+          </a:p>
+          <a:p>
+            <a:r>
+              <a:rPr sz="2000" b="1">
+                <a:solidFill>
+                  <a:srgbClr val="222222"/>
+                </a:solidFill>
+                <a:latin typeface="Calibri"/>
+              </a:rPr>
+              <a:t>4. A weather app must fetch the radar image, download the 5-day forecast and load a local news feed, then draw the forecast graph. Identify the concurrent tasks and the sequential step, with reasons. [3]</a:t>
+            </a:r>
+          </a:p>
+          <a:p>
+            <a:pPr lvl="1"/>
+            <a:r>
+              <a:rPr sz="1800" i="1">
+                <a:solidFill>
+                  <a:srgbClr val="B76E00"/>
+                </a:solidFill>
+                <a:latin typeface="Calibri"/>
+              </a:rPr>
+              <a:t>Answer: The three fetches are independent: none needs another's output, so they can run concurrently (1), making the screen load faster and keeping the app responsive (1). Drawing the graph consumes the downloaded forecast data, a data dependency, so it must run after that download completes (1).</a:t>
+            </a:r>
+          </a:p>
+        </p:txBody>
+      </p:sp>
+    </p:spTree>
+  </p:cSld>
+  <p:clrMapOvr>
+    <a:masterClrMapping/>
+  </p:clrMapOvr>
+</p:sld>
+</file>
+
+<file path=ppt/slides/slide26.xml><?xml version="1.0" encoding="utf-8"?>
+<p:sld xmlns:a="http://schemas.openxmlformats.org/drawingml/2006/main" xmlns:p="http://schemas.openxmlformats.org/presentationml/2006/main" xmlns:r="http://schemas.openxmlformats.org/officeDocument/2006/relationships">
+  <p:cSld>
+    <p:bg>
+      <p:bgPr>
+        <a:solidFill>
+          <a:srgbClr val="FFFFFF"/>
+        </a:solidFill>
+        <a:effectLst/>
+      </p:bgPr>
+    </p:bg>
+    <p:spTree>
+      <p:nvGrpSpPr>
+        <p:cNvPr id="1" name=""/>
+        <p:cNvGrpSpPr/>
+        <p:nvPr/>
+      </p:nvGrpSpPr>
+      <p:grpSpPr/>
+      <p:sp>
+        <p:nvSpPr>
+          <p:cNvPr id="2" name="TextBox 1"/>
+          <p:cNvSpPr txBox="1"/>
+          <p:nvPr/>
+        </p:nvSpPr>
+        <p:spPr>
+          <a:xfrm>
+            <a:off x="548640" y="274320"/>
+            <a:ext cx="11064240" cy="822960"/>
+          </a:xfrm>
+          <a:prstGeom prst="rect">
+            <a:avLst/>
+          </a:prstGeom>
+          <a:noFill/>
+        </p:spPr>
+        <p:txBody>
+          <a:bodyPr wrap="square">
+            <a:spAutoFit/>
+          </a:bodyPr>
+          <a:lstStyle/>
+          <a:p>
+            <a:r>
+              <a:rPr sz="3000" b="1" i="0">
+                <a:solidFill>
+                  <a:srgbClr val="2B6CB0"/>
+                </a:solidFill>
+                <a:latin typeface="Calibri"/>
+              </a:rPr>
+              <a:t>Common misconceptions</a:t>
+            </a:r>
+          </a:p>
+        </p:txBody>
+      </p:sp>
+      <p:sp>
+        <p:nvSpPr>
+          <p:cNvPr id="3" name="TextBox 2"/>
+          <p:cNvSpPr txBox="1"/>
+          <p:nvPr/>
+        </p:nvSpPr>
+        <p:spPr>
+          <a:xfrm>
+            <a:off x="640080" y="1280160"/>
+            <a:ext cx="10881360" cy="5120640"/>
+          </a:xfrm>
+          <a:prstGeom prst="rect">
+            <a:avLst/>
+          </a:prstGeom>
+          <a:noFill/>
+        </p:spPr>
+        <p:txBody>
+          <a:bodyPr wrap="square">
+            <a:spAutoFit/>
+          </a:bodyPr>
+          <a:lstStyle/>
+          <a:p>
+            <a:pPr/>
+            <a:r>
+              <a:rPr sz="2000" b="0">
+                <a:solidFill>
+                  <a:srgbClr val="222222"/>
+                </a:solidFill>
+                <a:latin typeface="Calibri"/>
+              </a:rPr>
+              <a:t>✗ Students often think concurrent always means faster; on one core it is only time-slicing, task-switching adds overhead, and dependent steps cannot overlap at all.</a:t>
+            </a:r>
+          </a:p>
+          <a:p>
+            <a:pPr/>
+            <a:r>
+              <a:rPr sz="2000" b="0">
+                <a:solidFill>
+                  <a:srgbClr val="222222"/>
+                </a:solidFill>
+                <a:latin typeface="Calibri"/>
+              </a:rPr>
+              <a:t>✗ Students often treat concurrent and parallel as synonyms; concurrency is overlapping progress, while parallel means literally simultaneous execution on separate cores.</a:t>
+            </a:r>
+          </a:p>
+          <a:p>
+            <a:pPr/>
+            <a:r>
+              <a:rPr sz="2000" b="0">
+                <a:solidFill>
+                  <a:srgbClr val="222222"/>
+                </a:solidFill>
+                <a:latin typeface="Calibri"/>
+              </a:rPr>
+              <a:t>✗ Students often claim any two tasks can run together; only independent tasks can, and the test is whether one consumes the other's output.</a:t>
+            </a:r>
+          </a:p>
+          <a:p>
+            <a:pPr/>
+            <a:r>
+              <a:rPr sz="2000" b="0">
+                <a:solidFill>
+                  <a:srgbClr val="222222"/>
+                </a:solidFill>
+                <a:latin typeface="Calibri"/>
+              </a:rPr>
+              <a:t>✗ Students often confuse a race condition with deadlock; a race gives a wrong or unpredictable result from timing, while deadlock means tasks wait on each other forever and nothing proceeds.</a:t>
+            </a:r>
+          </a:p>
+          <a:p>
+            <a:pPr/>
+            <a:r>
+              <a:rPr sz="2000" b="0">
+                <a:solidFill>
+                  <a:srgbClr val="222222"/>
+                </a:solidFill>
+                <a:latin typeface="Calibri"/>
+              </a:rPr>
+              <a:t>✗ Students often forget the recombining step; concurrent tasks usually need synchronising at the end, like a web page that renders only when all assets have arrived.</a:t>
+            </a:r>
+          </a:p>
+        </p:txBody>
+      </p:sp>
+    </p:spTree>
+  </p:cSld>
+  <p:clrMapOvr>
+    <a:masterClrMapping/>
+  </p:clrMapOvr>
+</p:sld>
+</file>
+
+<file path=ppt/slides/slide27.xml><?xml version="1.0" encoding="utf-8"?>
+<p:sld xmlns:a="http://schemas.openxmlformats.org/drawingml/2006/main" xmlns:p="http://schemas.openxmlformats.org/presentationml/2006/main" xmlns:r="http://schemas.openxmlformats.org/officeDocument/2006/relationships">
+  <p:cSld>
+    <p:bg>
+      <p:bgPr>
+        <a:solidFill>
+          <a:srgbClr val="FFFFFF"/>
+        </a:solidFill>
+        <a:effectLst/>
+      </p:bgPr>
+    </p:bg>
+    <p:spTree>
+      <p:nvGrpSpPr>
+        <p:cNvPr id="1" name=""/>
+        <p:cNvGrpSpPr/>
+        <p:nvPr/>
+      </p:nvGrpSpPr>
+      <p:grpSpPr/>
+      <p:sp>
+        <p:nvSpPr>
+          <p:cNvPr id="2" name="TextBox 1"/>
+          <p:cNvSpPr txBox="1"/>
+          <p:nvPr/>
+        </p:nvSpPr>
+        <p:spPr>
+          <a:xfrm>
+            <a:off x="548640" y="274320"/>
+            <a:ext cx="11064240" cy="822960"/>
+          </a:xfrm>
+          <a:prstGeom prst="rect">
+            <a:avLst/>
+          </a:prstGeom>
+          <a:noFill/>
+        </p:spPr>
+        <p:txBody>
+          <a:bodyPr wrap="square">
+            <a:spAutoFit/>
+          </a:bodyPr>
+          <a:lstStyle/>
+          <a:p>
+            <a:r>
+              <a:rPr sz="3000" b="1" i="0">
+                <a:solidFill>
+                  <a:srgbClr val="2B6CB0"/>
+                </a:solidFill>
+                <a:latin typeface="Calibri"/>
+              </a:rPr>
+              <a:t>How the exam asks this</a:t>
+            </a:r>
+          </a:p>
+        </p:txBody>
+      </p:sp>
+      <p:sp>
+        <p:nvSpPr>
+          <p:cNvPr id="3" name="TextBox 2"/>
+          <p:cNvSpPr txBox="1"/>
+          <p:nvPr/>
+        </p:nvSpPr>
+        <p:spPr>
+          <a:xfrm>
+            <a:off x="640080" y="1280160"/>
+            <a:ext cx="10881360" cy="5120640"/>
+          </a:xfrm>
+          <a:prstGeom prst="rect">
+            <a:avLst/>
+          </a:prstGeom>
+          <a:noFill/>
+        </p:spPr>
+        <p:txBody>
+          <a:bodyPr wrap="square">
+            <a:spAutoFit/>
+          </a:bodyPr>
+          <a:lstStyle/>
+          <a:p>
+            <a:pPr/>
+            <a:r>
+              <a:rPr sz="2000" b="0">
+                <a:solidFill>
+                  <a:srgbClr val="222222"/>
+                </a:solidFill>
+                <a:latin typeface="Calibri"/>
+              </a:rPr>
+              <a:t>KA8 is sat this week: a cumulative assessment covering 2.1.1 to 2.1.5, so today's Do Now sweep of abstraction, thinking ahead, procedural and logical thinking is direct revision.</a:t>
+            </a:r>
+          </a:p>
+          <a:p>
+            <a:pPr/>
+            <a:r>
+              <a:rPr sz="2000" b="0">
+                <a:solidFill>
+                  <a:srgbClr val="222222"/>
+                </a:solidFill>
+                <a:latin typeface="Calibri"/>
+              </a:rPr>
+              <a:t>Command words seen here: identify tasks that can run concurrently (2-3 marks, justification via dependencies required), explain a benefit or drawback (2-4 marks), discuss/evaluate concurrency for a scenario (up to 9 marks).</a:t>
+            </a:r>
+          </a:p>
+          <a:p>
+            <a:pPr/>
+            <a:r>
+              <a:rPr sz="2000" b="0">
+                <a:solidFill>
+                  <a:srgbClr val="222222"/>
+                </a:solidFill>
+                <a:latin typeface="Calibri"/>
+              </a:rPr>
+              <a:t>Discuss questions are marked on both sides: pair each benefit (speed, responsiveness, hardware use) with a trade-off (race conditions, coordination overhead, harder testing), applied to the scenario's actual tasks.</a:t>
+            </a:r>
+          </a:p>
+          <a:p>
+            <a:pPr/>
+            <a:r>
+              <a:rPr sz="2000" b="0">
+                <a:solidFill>
+                  <a:srgbClr val="222222"/>
+                </a:solidFill>
+                <a:latin typeface="Calibri"/>
+              </a:rPr>
+              <a:t>Example stem: 'An online store processes orders by checking stock, taking payment and emailing a receipt, for many customers at once. Discuss the benefits and drawbacks of the store handling customers' orders concurrently.' [9]</a:t>
+            </a:r>
+          </a:p>
+        </p:txBody>
+      </p:sp>
+    </p:spTree>
+  </p:cSld>
+  <p:clrMapOvr>
+    <a:masterClrMapping/>
+  </p:clrMapOvr>
+</p:sld>
+</file>
+
+<file path=ppt/slides/slide28.xml><?xml version="1.0" encoding="utf-8"?>
+<p:sld xmlns:a="http://schemas.openxmlformats.org/drawingml/2006/main" xmlns:p="http://schemas.openxmlformats.org/presentationml/2006/main" xmlns:r="http://schemas.openxmlformats.org/officeDocument/2006/relationships">
+  <p:cSld>
+    <p:bg>
+      <p:bgPr>
+        <a:solidFill>
+          <a:srgbClr val="FFFFFF"/>
+        </a:solidFill>
+        <a:effectLst/>
+      </p:bgPr>
+    </p:bg>
+    <p:spTree>
+      <p:nvGrpSpPr>
+        <p:cNvPr id="1" name=""/>
+        <p:cNvGrpSpPr/>
+        <p:nvPr/>
+      </p:nvGrpSpPr>
+      <p:grpSpPr/>
+      <p:sp>
+        <p:nvSpPr>
+          <p:cNvPr id="2" name="TextBox 1"/>
+          <p:cNvSpPr txBox="1"/>
+          <p:nvPr/>
+        </p:nvSpPr>
+        <p:spPr>
+          <a:xfrm>
+            <a:off x="548640" y="274320"/>
+            <a:ext cx="11064240" cy="822960"/>
+          </a:xfrm>
+          <a:prstGeom prst="rect">
+            <a:avLst/>
+          </a:prstGeom>
+          <a:noFill/>
+        </p:spPr>
+        <p:txBody>
+          <a:bodyPr wrap="square">
+            <a:spAutoFit/>
+          </a:bodyPr>
+          <a:lstStyle/>
+          <a:p>
+            <a:r>
+              <a:rPr sz="3000" b="1" i="0">
+                <a:solidFill>
+                  <a:srgbClr val="2B6CB0"/>
+                </a:solidFill>
+                <a:latin typeface="Calibri"/>
+              </a:rPr>
+              <a:t>Your turn</a:t>
+            </a:r>
+          </a:p>
+        </p:txBody>
+      </p:sp>
+      <p:sp>
+        <p:nvSpPr>
+          <p:cNvPr id="3" name="TextBox 2"/>
+          <p:cNvSpPr txBox="1"/>
+          <p:nvPr/>
+        </p:nvSpPr>
+        <p:spPr>
+          <a:xfrm>
+            <a:off x="640080" y="1280160"/>
+            <a:ext cx="10881360" cy="5120640"/>
+          </a:xfrm>
+          <a:prstGeom prst="rect">
+            <a:avLst/>
+          </a:prstGeom>
+          <a:noFill/>
+        </p:spPr>
+        <p:txBody>
+          <a:bodyPr wrap="square">
+            <a:spAutoFit/>
+          </a:bodyPr>
+          <a:lstStyle/>
+          <a:p>
+            <a:pPr/>
+            <a:r>
+              <a:rPr sz="2400" b="1">
+                <a:solidFill>
+                  <a:srgbClr val="2B6CB0"/>
+                </a:solidFill>
+                <a:latin typeface="Calibri"/>
+              </a:rPr>
+              <a:t>Task</a:t>
+            </a:r>
+          </a:p>
+          <a:p>
+            <a:pPr lvl="1"/>
+            <a:r>
+              <a:rPr sz="2200" b="0">
+                <a:solidFill>
+                  <a:srgbClr val="222222"/>
+                </a:solidFill>
+                <a:latin typeface="Calibri"/>
+              </a:rPr>
+              <a:t>An online store builds its daily sales report by (i) totalling each of four regions' sales and (ii) combining the regional totals into a grand total. State which parts can run concurrently and which must wait, justifying both with the dependency test; then give one benefit of the concurrent design and one trade-off the developers accept. (The four regional totals are independent, so they can run concurrently, one per core; the grand total consumes all four outputs, so it must wait for every region: a synchronisation point. Benefit: the report finishes in roughly the time of the slowest region. Trade-off: coordination code to split, track and recombine the work, and harder testing.)</a:t>
+            </a:r>
+          </a:p>
+          <a:p>
+            <a:r>
+              <a:rPr sz="2400" b="1">
+                <a:solidFill>
+                  <a:srgbClr val="B76E00"/>
+                </a:solidFill>
+                <a:latin typeface="Calibri"/>
+              </a:rPr>
+              <a:t>Challenge / stretch</a:t>
+            </a:r>
+          </a:p>
+          <a:p>
+            <a:pPr lvl="1"/>
+            <a:r>
+              <a:rPr sz="2200" b="0">
+                <a:solidFill>
+                  <a:srgbClr val="222222"/>
+                </a:solidFill>
+                <a:latin typeface="Calibri"/>
+              </a:rPr>
+              <a:t>A ticket-booking site risks selling the last seat twice when two customers book concurrently. Explain step by step how this race condition arises (both read seatsLeft = 1 before either writes 0), describe one way to prevent it (make check-and-book a take-turns step on the shared seat data), and evaluate the cost of your fix (customers queue for the shared step, reducing the speed benefit; the coordination code also makes the system harder to test).</a:t>
+            </a:r>
+          </a:p>
+        </p:txBody>
+      </p:sp>
+    </p:spTree>
+  </p:cSld>
+  <p:clrMapOvr>
+    <a:masterClrMapping/>
+  </p:clrMapOvr>
+</p:sld>
+</file>
+
+<file path=ppt/slides/slide29.xml><?xml version="1.0" encoding="utf-8"?>
+<p:sld xmlns:a="http://schemas.openxmlformats.org/drawingml/2006/main" xmlns:p="http://schemas.openxmlformats.org/presentationml/2006/main" xmlns:r="http://schemas.openxmlformats.org/officeDocument/2006/relationships">
+  <p:cSld>
+    <p:bg>
+      <p:bgPr>
+        <a:solidFill>
+          <a:srgbClr val="FFFFFF"/>
+        </a:solidFill>
+        <a:effectLst/>
+      </p:bgPr>
+    </p:bg>
+    <p:spTree>
+      <p:nvGrpSpPr>
+        <p:cNvPr id="1" name=""/>
+        <p:cNvGrpSpPr/>
+        <p:nvPr/>
+      </p:nvGrpSpPr>
+      <p:grpSpPr/>
+      <p:sp>
+        <p:nvSpPr>
+          <p:cNvPr id="2" name="TextBox 1"/>
+          <p:cNvSpPr txBox="1"/>
+          <p:nvPr/>
+        </p:nvSpPr>
+        <p:spPr>
+          <a:xfrm>
+            <a:off x="548640" y="274320"/>
+            <a:ext cx="11064240" cy="822960"/>
+          </a:xfrm>
+          <a:prstGeom prst="rect">
+            <a:avLst/>
+          </a:prstGeom>
+          <a:noFill/>
+        </p:spPr>
+        <p:txBody>
+          <a:bodyPr wrap="square">
+            <a:spAutoFit/>
+          </a:bodyPr>
+          <a:lstStyle/>
+          <a:p>
+            <a:r>
+              <a:rPr sz="3000" b="1" i="0">
+                <a:solidFill>
+                  <a:srgbClr val="2B6CB0"/>
+                </a:solidFill>
+                <a:latin typeface="Calibri"/>
+              </a:rPr>
+              <a:t>Exit ticket</a:t>
+            </a:r>
+          </a:p>
+        </p:txBody>
+      </p:sp>
+      <p:sp>
+        <p:nvSpPr>
+          <p:cNvPr id="3" name="TextBox 2"/>
+          <p:cNvSpPr txBox="1"/>
+          <p:nvPr/>
+        </p:nvSpPr>
+        <p:spPr>
+          <a:xfrm>
+            <a:off x="640080" y="1280160"/>
+            <a:ext cx="10881360" cy="5120640"/>
+          </a:xfrm>
+          <a:prstGeom prst="rect">
+            <a:avLst/>
+          </a:prstGeom>
+          <a:noFill/>
+        </p:spPr>
+        <p:txBody>
+          <a:bodyPr wrap="square">
+            <a:spAutoFit/>
+          </a:bodyPr>
+          <a:lstStyle/>
+          <a:p>
+            <a:r>
+              <a:rPr sz="2200" b="1">
+                <a:solidFill>
+                  <a:srgbClr val="222222"/>
+                </a:solidFill>
+                <a:latin typeface="Calibri"/>
+              </a:rPr>
+              <a:t>1. Which pair is safe to run concurrently, and why: (A) rendering a clip then exporting that same clip, or (B) generating audio for scene 1 and for scene 2?</a:t>
+            </a:r>
+          </a:p>
+          <a:p>
+            <a:r>
+              <a:rPr sz="2200" b="1">
+                <a:solidFill>
+                  <a:srgbClr val="222222"/>
+                </a:solidFill>
+                <a:latin typeface="Calibri"/>
+              </a:rPr>
+              <a:t>2. Two tasks update a shared total without taking turns and the final figure depends on which finished last. Name the problem.</a:t>
+            </a:r>
+          </a:p>
+          <a:p>
+            <a:r>
+              <a:rPr sz="2200" b="1">
+                <a:solidFill>
+                  <a:srgbClr val="222222"/>
+                </a:solidFill>
+                <a:latin typeface="Calibri"/>
+              </a:rPr>
+              <a:t>3. Give one benefit and one trade-off of concurrency for a phone app downloading a large file.</a:t>
             </a:r>
           </a:p>
         </p:txBody>
@@ -4092,7 +6372,7 @@
                 </a:solidFill>
                 <a:latin typeface="Calibri"/>
               </a:rPr>
-              <a:t>1. When can two tasks safely run concurrently?</a:t>
+              <a:t>1. From 2.1.1: what is the difference between representational abstraction and abstraction by generalisation?</a:t>
             </a:r>
           </a:p>
           <a:p>
@@ -4103,7 +6383,7 @@
                 </a:solidFill>
                 <a:latin typeface="Calibri"/>
               </a:rPr>
-              <a:t>2. What is a race condition?</a:t>
+              <a:t>2. From 2.1.2: what is caching, and what is its main risk?</a:t>
             </a:r>
           </a:p>
           <a:p>
@@ -4114,7 +6394,7 @@
                 </a:solidFill>
                 <a:latin typeface="Calibri"/>
               </a:rPr>
-              <a:t>3. What is deadlock?</a:t>
+              <a:t>3. From 2.1.3: what does it mean to decompose a problem, and why do it?</a:t>
             </a:r>
           </a:p>
           <a:p>
@@ -4125,7 +6405,7 @@
                 </a:solidFill>
                 <a:latin typeface="Calibri"/>
               </a:rPr>
-              <a:t>4. On a single core, what does 'concurrent' really mean?</a:t>
+              <a:t>4. From 2.1.4: rewrite 'if the user is old enough' as a condition suitable for a flowchart decision.</a:t>
             </a:r>
           </a:p>
           <a:p>
@@ -4136,7 +6416,159 @@
                 </a:solidFill>
                 <a:latin typeface="Calibri"/>
               </a:rPr>
-              <a:t>5. Interleaving (2.1.3): how does a data dependency limit concurrency?</a:t>
+              <a:t>5. From 1.4.3 part 2: state the Sum and Carry expressions of a half adder.</a:t>
+            </a:r>
+          </a:p>
+        </p:txBody>
+      </p:sp>
+    </p:spTree>
+  </p:cSld>
+  <p:clrMapOvr>
+    <a:masterClrMapping/>
+  </p:clrMapOvr>
+</p:sld>
+</file>
+
+<file path=ppt/slides/slide30.xml><?xml version="1.0" encoding="utf-8"?>
+<p:sld xmlns:a="http://schemas.openxmlformats.org/drawingml/2006/main" xmlns:p="http://schemas.openxmlformats.org/presentationml/2006/main" xmlns:r="http://schemas.openxmlformats.org/officeDocument/2006/relationships">
+  <p:cSld>
+    <p:bg>
+      <p:bgPr>
+        <a:solidFill>
+          <a:srgbClr val="FFFFFF"/>
+        </a:solidFill>
+        <a:effectLst/>
+      </p:bgPr>
+    </p:bg>
+    <p:spTree>
+      <p:nvGrpSpPr>
+        <p:cNvPr id="1" name=""/>
+        <p:cNvGrpSpPr/>
+        <p:nvPr/>
+      </p:nvGrpSpPr>
+      <p:grpSpPr/>
+      <p:sp>
+        <p:nvSpPr>
+          <p:cNvPr id="2" name="TextBox 1"/>
+          <p:cNvSpPr txBox="1"/>
+          <p:nvPr/>
+        </p:nvSpPr>
+        <p:spPr>
+          <a:xfrm>
+            <a:off x="548640" y="274320"/>
+            <a:ext cx="11064240" cy="822960"/>
+          </a:xfrm>
+          <a:prstGeom prst="rect">
+            <a:avLst/>
+          </a:prstGeom>
+          <a:noFill/>
+        </p:spPr>
+        <p:txBody>
+          <a:bodyPr wrap="square">
+            <a:spAutoFit/>
+          </a:bodyPr>
+          <a:lstStyle/>
+          <a:p>
+            <a:r>
+              <a:rPr sz="3000" b="1" i="0">
+                <a:solidFill>
+                  <a:srgbClr val="2B6CB0"/>
+                </a:solidFill>
+                <a:latin typeface="Calibri"/>
+              </a:rPr>
+              <a:t>Exit ticket — answers</a:t>
+            </a:r>
+          </a:p>
+        </p:txBody>
+      </p:sp>
+      <p:sp>
+        <p:nvSpPr>
+          <p:cNvPr id="3" name="TextBox 2"/>
+          <p:cNvSpPr txBox="1"/>
+          <p:nvPr/>
+        </p:nvSpPr>
+        <p:spPr>
+          <a:xfrm>
+            <a:off x="640080" y="1280160"/>
+            <a:ext cx="10881360" cy="5120640"/>
+          </a:xfrm>
+          <a:prstGeom prst="rect">
+            <a:avLst/>
+          </a:prstGeom>
+          <a:noFill/>
+        </p:spPr>
+        <p:txBody>
+          <a:bodyPr wrap="square">
+            <a:spAutoFit/>
+          </a:bodyPr>
+          <a:lstStyle/>
+          <a:p>
+            <a:r>
+              <a:rPr sz="2200" b="1">
+                <a:solidFill>
+                  <a:srgbClr val="222222"/>
+                </a:solidFill>
+                <a:latin typeface="Calibri"/>
+              </a:rPr>
+              <a:t>1. Which pair is safe to run concurrently, and why: (A) rendering a clip then exporting that same clip, or (B) generating audio for scene 1 and for scene 2?</a:t>
+            </a:r>
+          </a:p>
+          <a:p>
+            <a:pPr lvl="1"/>
+            <a:r>
+              <a:rPr sz="1800" i="1">
+                <a:solidFill>
+                  <a:srgbClr val="B76E00"/>
+                </a:solidFill>
+                <a:latin typeface="Calibri"/>
+              </a:rPr>
+              <a:t>Answer: B: the two scenes share no data, so the tasks are independent; A has a data dependency because exporting consumes the rendered clip.</a:t>
+            </a:r>
+          </a:p>
+          <a:p>
+            <a:r>
+              <a:rPr sz="2200" b="1">
+                <a:solidFill>
+                  <a:srgbClr val="222222"/>
+                </a:solidFill>
+                <a:latin typeface="Calibri"/>
+              </a:rPr>
+              <a:t>2. Two tasks update a shared total without taking turns and the final figure depends on which finished last. Name the problem.</a:t>
+            </a:r>
+          </a:p>
+          <a:p>
+            <a:pPr lvl="1"/>
+            <a:r>
+              <a:rPr sz="1800" i="1">
+                <a:solidFill>
+                  <a:srgbClr val="B76E00"/>
+                </a:solidFill>
+                <a:latin typeface="Calibri"/>
+              </a:rPr>
+              <a:t>Answer: A race condition.</a:t>
+            </a:r>
+          </a:p>
+          <a:p>
+            <a:r>
+              <a:rPr sz="2200" b="1">
+                <a:solidFill>
+                  <a:srgbClr val="222222"/>
+                </a:solidFill>
+                <a:latin typeface="Calibri"/>
+              </a:rPr>
+              <a:t>3. Give one benefit and one trade-off of concurrency for a phone app downloading a large file.</a:t>
+            </a:r>
+          </a:p>
+          <a:p>
+            <a:pPr lvl="1"/>
+            <a:r>
+              <a:rPr sz="1800" i="1">
+                <a:solidFill>
+                  <a:srgbClr val="B76E00"/>
+                </a:solidFill>
+                <a:latin typeface="Calibri"/>
+              </a:rPr>
+              <a:t>Answer: Benefit: the interface stays responsive during the download. Trade-off: coordination is needed (e.g. shared progress data must be handled carefully), making the app harder to write and test.</a:t>
             </a:r>
           </a:p>
         </p:txBody>
@@ -4230,7 +6662,7 @@
                 </a:solidFill>
                 <a:latin typeface="Calibri"/>
               </a:rPr>
-              <a:t>1. When can two tasks safely run concurrently?</a:t>
+              <a:t>1. From 2.1.1: what is the difference between representational abstraction and abstraction by generalisation?</a:t>
             </a:r>
           </a:p>
           <a:p>
@@ -4242,7 +6674,7 @@
                 </a:solidFill>
                 <a:latin typeface="Calibri"/>
               </a:rPr>
-              <a:t>Answer: When they are independent — they share no data, so neither depends on the other's result.</a:t>
+              <a:t>Answer: Representational abstraction removes unnecessary detail from one specific thing (e.g. the Tube map); generalisation groups many things by shared characteristics (e.g. an Animal superclass).</a:t>
             </a:r>
           </a:p>
           <a:p>
@@ -4253,7 +6685,7 @@
                 </a:solidFill>
                 <a:latin typeface="Calibri"/>
               </a:rPr>
-              <a:t>2. What is a race condition?</a:t>
+              <a:t>2. From 2.1.2: what is caching, and what is its main risk?</a:t>
             </a:r>
           </a:p>
           <a:p>
@@ -4265,7 +6697,7 @@
                 </a:solidFill>
                 <a:latin typeface="Calibri"/>
               </a:rPr>
-              <a:t>Answer: When the result depends on the unpredictable timing of concurrent tasks that share data.</a:t>
+              <a:t>Answer: Storing frequently used or expensive-to-fetch data in faster storage for reuse; the risk is stale data if the source changes and the copy is not refreshed.</a:t>
             </a:r>
           </a:p>
           <a:p>
@@ -4276,7 +6708,7 @@
                 </a:solidFill>
                 <a:latin typeface="Calibri"/>
               </a:rPr>
-              <a:t>3. What is deadlock?</a:t>
+              <a:t>3. From 2.1.3: what does it mean to decompose a problem, and why do it?</a:t>
             </a:r>
           </a:p>
           <a:p>
@@ -4288,7 +6720,7 @@
                 </a:solidFill>
                 <a:latin typeface="Calibri"/>
               </a:rPr>
-              <a:t>Answer: When tasks each wait for a resource the other holds, so none can proceed.</a:t>
+              <a:t>Answer: Break it into smaller sub-problems, each simple enough to specify exactly; parts can then be built, tested and reused independently.</a:t>
             </a:r>
           </a:p>
           <a:p>
@@ -4299,7 +6731,7 @@
                 </a:solidFill>
                 <a:latin typeface="Calibri"/>
               </a:rPr>
-              <a:t>4. On a single core, what does 'concurrent' really mean?</a:t>
+              <a:t>4. From 2.1.4: rewrite 'if the user is old enough' as a condition suitable for a flowchart decision.</a:t>
             </a:r>
           </a:p>
           <a:p>
@@ -4311,7 +6743,7 @@
                 </a:solidFill>
                 <a:latin typeface="Calibri"/>
               </a:rPr>
-              <a:t>Answer: Time-slicing — the processor rapidly switches between tasks rather than running them truly simultaneously.</a:t>
+              <a:t>Answer: An exact, testable Boolean such as if age &gt;= 18; vague phrases cannot be evaluated.</a:t>
             </a:r>
           </a:p>
           <a:p>
@@ -4322,7 +6754,7 @@
                 </a:solidFill>
                 <a:latin typeface="Calibri"/>
               </a:rPr>
-              <a:t>5. Interleaving (2.1.3): how does a data dependency limit concurrency?</a:t>
+              <a:t>5. From 1.4.3 part 2: state the Sum and Carry expressions of a half adder.</a:t>
             </a:r>
           </a:p>
           <a:p>
@@ -4334,7 +6766,7 @@
                 </a:solidFill>
                 <a:latin typeface="Calibri"/>
               </a:rPr>
-              <a:t>Answer: A step needing an earlier step's output must run after it, so dependent steps cannot be parallelised.</a:t>
+              <a:t>Answer: Sum = A ⊻ B and Carry = A ∧ B; it adds two bits and has no carry-in.</a:t>
             </a:r>
           </a:p>
         </p:txBody>
@@ -4438,7 +6870,7 @@
                 </a:solidFill>
                 <a:latin typeface="Calibri"/>
               </a:rPr>
-              <a:t> — Spotting parts of a problem that can run at the same time (in parallel or interleaved).</a:t>
+              <a:t> — Identifying the parts of a problem that can be carried out at the same time rather than one after another.</a:t>
             </a:r>
           </a:p>
           <a:p>
@@ -4458,7 +6890,7 @@
                 </a:solidFill>
                 <a:latin typeface="Calibri"/>
               </a:rPr>
-              <a:t> — Running multiple tasks in overlapping time, by true parallelism or time-slicing.</a:t>
+              <a:t> — Multiple tasks making progress in overlapping time, by true parallelism or by interleaving.</a:t>
             </a:r>
           </a:p>
           <a:p>
@@ -4478,7 +6910,7 @@
                 </a:solidFill>
                 <a:latin typeface="Calibri"/>
               </a:rPr>
-              <a:t> — Multiple tasks running literally simultaneously on multiple cores.</a:t>
+              <a:t> — Tasks running literally simultaneously, each on its own processor core.</a:t>
             </a:r>
           </a:p>
           <a:p>
@@ -4498,7 +6930,7 @@
                 </a:solidFill>
                 <a:latin typeface="Calibri"/>
               </a:rPr>
-              <a:t> — A single core rapidly switching between tasks so they appear to run together.</a:t>
+              <a:t> — One core switching rapidly between tasks so they appear simultaneous without truly being so.</a:t>
             </a:r>
           </a:p>
           <a:p>
@@ -4518,7 +6950,7 @@
                 </a:solidFill>
                 <a:latin typeface="Calibri"/>
               </a:rPr>
-              <a:t> — When one task needs another's output, forcing them to run sequentially.</a:t>
+              <a:t> — When one task needs another task's output, forcing those tasks to run in sequence.</a:t>
             </a:r>
           </a:p>
           <a:p>
@@ -4538,7 +6970,7 @@
                 </a:solidFill>
                 <a:latin typeface="Calibri"/>
               </a:rPr>
-              <a:t> — When the outcome depends on the unpredictable timing of concurrent tasks sharing data.</a:t>
+              <a:t> — When the result of concurrent tasks sharing data depends on the unpredictable order they run in.</a:t>
             </a:r>
           </a:p>
           <a:p>
@@ -4558,7 +6990,7 @@
                 </a:solidFill>
                 <a:latin typeface="Calibri"/>
               </a:rPr>
-              <a:t> — When tasks each hold a resource the other needs and neither releases it, so both wait forever.</a:t>
+              <a:t> — When tasks each hold a resource another needs and all wait forever, so none can proceed.</a:t>
             </a:r>
           </a:p>
           <a:p>
@@ -4578,7 +7010,7 @@
                 </a:solidFill>
                 <a:latin typeface="Calibri"/>
               </a:rPr>
-              <a:t> — Coordinating concurrent tasks and recombining their results safely.</a:t>
+              <a:t> — Coordinating concurrent tasks: controlling access to shared data and recombining results at the end.</a:t>
             </a:r>
           </a:p>
         </p:txBody>
@@ -4638,7 +7070,7 @@
                 </a:solidFill>
                 <a:latin typeface="Calibri"/>
               </a:rPr>
-              <a:t>What concurrency is</a:t>
+              <a:t>What thinking concurrently means</a:t>
             </a:r>
           </a:p>
         </p:txBody>
@@ -4673,7 +7105,7 @@
                 </a:solidFill>
                 <a:latin typeface="Calibri"/>
               </a:rPr>
-              <a:t>Running parts of a problem at the same time, in parallel or interleaved.</a:t>
+              <a:t>Most plans are written as one step after another, but many steps do not need to wait.</a:t>
             </a:r>
           </a:p>
           <a:p>
@@ -4685,7 +7117,7 @@
                 </a:solidFill>
                 <a:latin typeface="Calibri"/>
               </a:rPr>
-              <a:t>True parallelism needs multiple cores; a single core time-slices.</a:t>
+              <a:t>Thinking concurrently means spotting the parts of a problem that can happen at the same time.</a:t>
             </a:r>
           </a:p>
           <a:p>
@@ -4697,7 +7129,19 @@
                 </a:solidFill>
                 <a:latin typeface="Calibri"/>
               </a:rPr>
-              <a:t>Only independent tasks (no shared data) are safe to run together.</a:t>
+              <a:t>Tasks progress in overlapping time instead of strictly in sequence.</a:t>
+            </a:r>
+          </a:p>
+          <a:p>
+            <a:pPr/>
+            <a:r>
+              <a:rPr sz="2000" b="0">
+                <a:solidFill>
+                  <a:srgbClr val="222222"/>
+                </a:solidFill>
+                <a:latin typeface="Calibri"/>
+              </a:rPr>
+              <a:t>It is a design skill: you decide what could overlap before writing any code.</a:t>
             </a:r>
           </a:p>
         </p:txBody>
@@ -4757,7 +7201,7 @@
                 </a:solidFill>
                 <a:latin typeface="Calibri"/>
               </a:rPr>
-              <a:t>Benefits</a:t>
+              <a:t>Concurrent versus parallel</a:t>
             </a:r>
           </a:p>
         </p:txBody>
@@ -4792,7 +7236,7 @@
                 </a:solidFill>
                 <a:latin typeface="Calibri"/>
               </a:rPr>
-              <a:t>Faster completion and better throughput on multi-core hardware.</a:t>
+              <a:t>Parallel processing: tasks run literally at the same instant on separate cores.</a:t>
             </a:r>
           </a:p>
           <a:p>
@@ -4804,7 +7248,7 @@
                 </a:solidFill>
                 <a:latin typeface="Calibri"/>
               </a:rPr>
-              <a:t>More responsive programs — the UI stays free while a task runs.</a:t>
+              <a:t>On a single core, concurrency is time-slicing: the core switches rapidly between tasks.</a:t>
             </a:r>
           </a:p>
           <a:p>
@@ -4816,7 +7260,31 @@
                 </a:solidFill>
                 <a:latin typeface="Calibri"/>
               </a:rPr>
-              <a:t>Example: a file download runs while the rest of the program keeps responding.</a:t>
+              <a:t>Time-slicing gives the appearance of simultaneity but no extra computing power.</a:t>
+            </a:r>
+          </a:p>
+          <a:p>
+            <a:pPr/>
+            <a:r>
+              <a:rPr sz="2000" b="0">
+                <a:solidFill>
+                  <a:srgbClr val="222222"/>
+                </a:solidFill>
+                <a:latin typeface="Calibri"/>
+              </a:rPr>
+              <a:t>Concurrent describes the design (overlapping tasks); parallel describes one way of executing it.</a:t>
+            </a:r>
+          </a:p>
+          <a:p>
+            <a:pPr/>
+            <a:r>
+              <a:rPr sz="1800" b="1">
+                <a:solidFill>
+                  <a:srgbClr val="B76E00"/>
+                </a:solidFill>
+                <a:latin typeface="Calibri"/>
+              </a:rPr>
+              <a:t>Exam nuance: concurrent execution on one core is not faster for CPU-heavy work, because nothing truly overlaps.</a:t>
             </a:r>
           </a:p>
         </p:txBody>
@@ -4876,7 +7344,7 @@
                 </a:solidFill>
                 <a:latin typeface="Calibri"/>
               </a:rPr>
-              <a:t>Trade-offs</a:t>
+              <a:t>The dependency test</a:t>
             </a:r>
           </a:p>
         </p:txBody>
@@ -4911,7 +7379,7 @@
                 </a:solidFill>
                 <a:latin typeface="Calibri"/>
               </a:rPr>
-              <a:t>Harder to design, program and debug.</a:t>
+              <a:t>Two tasks can run concurrently only if they are independent.</a:t>
             </a:r>
           </a:p>
           <a:p>
@@ -4923,7 +7391,7 @@
                 </a:solidFill>
                 <a:latin typeface="Calibri"/>
               </a:rPr>
-              <a:t>Risk of race conditions and deadlock when tasks share resources.</a:t>
+              <a:t>The test question: does one task consume the other task's output?</a:t>
             </a:r>
           </a:p>
           <a:p>
@@ -4935,7 +7403,31 @@
                 </a:solidFill>
                 <a:latin typeface="Calibri"/>
               </a:rPr>
-              <a:t>Results often need synchronising and recombining.</a:t>
+              <a:t>If yes, there is a data dependency and the tasks must stay in sequence.</a:t>
+            </a:r>
+          </a:p>
+          <a:p>
+            <a:pPr/>
+            <a:r>
+              <a:rPr sz="2000" b="0">
+                <a:solidFill>
+                  <a:srgbClr val="222222"/>
+                </a:solidFill>
+                <a:latin typeface="Calibri"/>
+              </a:rPr>
+              <a:t>If no shared data and no consumed output, the tasks are safe to overlap.</a:t>
+            </a:r>
+          </a:p>
+          <a:p>
+            <a:pPr/>
+            <a:r>
+              <a:rPr sz="1800" b="1">
+                <a:solidFill>
+                  <a:srgbClr val="B76E00"/>
+                </a:solidFill>
+                <a:latin typeface="Calibri"/>
+              </a:rPr>
+              <a:t>Always run the dependency test before claiming tasks can run together: examiners reward the justification.</a:t>
             </a:r>
           </a:p>
         </p:txBody>
@@ -4995,7 +7487,7 @@
                 </a:solidFill>
                 <a:latin typeface="Calibri"/>
               </a:rPr>
-              <a:t>Not always faster</a:t>
+              <a:t>Everyday concurrency</a:t>
             </a:r>
           </a:p>
         </p:txBody>
@@ -5030,7 +7522,7 @@
                 </a:solidFill>
                 <a:latin typeface="Calibri"/>
               </a:rPr>
-              <a:t>On a single core there is no true parallelism, only time-slicing.</a:t>
+              <a:t>Cooking: rice boils while vegetables are chopped, but plating must wait for both.</a:t>
             </a:r>
           </a:p>
           <a:p>
@@ -5042,7 +7534,7 @@
                 </a:solidFill>
                 <a:latin typeface="Calibri"/>
               </a:rPr>
-              <a:t>Creating and managing threads adds overhead.</a:t>
+              <a:t>Building a house: plumbing and wiring proceed together, but both need the walls first.</a:t>
             </a:r>
           </a:p>
           <a:p>
@@ -5054,7 +7546,19 @@
                 </a:solidFill>
                 <a:latin typeface="Calibri"/>
               </a:rPr>
-              <a:t>Some problems are inherently sequential due to data dependencies.</a:t>
+              <a:t>A supermarket opens more checkouts: independent customers are served in parallel.</a:t>
+            </a:r>
+          </a:p>
+          <a:p>
+            <a:pPr/>
+            <a:r>
+              <a:rPr sz="2000" b="0">
+                <a:solidFill>
+                  <a:srgbClr val="222222"/>
+                </a:solidFill>
+                <a:latin typeface="Calibri"/>
+              </a:rPr>
+              <a:t>In each case some steps overlap and some are forced into order by dependencies.</a:t>
             </a:r>
           </a:p>
         </p:txBody>
